--- a/Planificador_de_Estudio_Multi-Agente.pptx
+++ b/Planificador_de_Estudio_Multi-Agente.pptx
@@ -300,7 +300,7 @@
                   <c:v>2</c:v>
                 </c:pt>
                 <c:pt idx="4">
-                  <c:v>0</c:v>
+                  <c:v>2</c:v>
                 </c:pt>
                 <c:pt idx="5">
                   <c:v>15</c:v>
@@ -4232,7 +4232,7 @@
                 </a:solidFill>
                 <a:latin typeface="DM Sans"/>
               </a:rPr>
-              <a:t>Datos faltantes se declaran como supuestos; datos erróneos requieren validación humana.</a:t>
+              <a:t>Datos faltantes se declaran como supuestos, pero el typo «Vienes» se ignoró sin avisar el viernes.</a:t>
             </a:r>
           </a:p>
         </p:txBody>
@@ -4302,7 +4302,241 @@
                 </a:solidFill>
                 <a:latin typeface="DM Sans"/>
               </a:rPr>
-              <a:t>Integración directa con Canvas/Google Calendar y agente de seguimiento semanal.</a:t>
+              <a:t>Avisar de días no reconocidos, tool para el descanso, seguimiento semanal. Ya hay export .ics (extra).</a:t>
+            </a:r>
+          </a:p>
+        </p:txBody>
+      </p:sp>
+      <p:sp>
+        <p:nvSpPr>
+          <p:cNvPr id="16" name="Hallazgo card"/>
+          <p:cNvSpPr/>
+          <p:nvPr/>
+        </p:nvSpPr>
+        <p:spPr>
+          <a:xfrm>
+            <a:off x="609905" y="4315968"/>
+            <a:ext cx="7232904" cy="1691640"/>
+          </a:xfrm>
+          <a:prstGeom prst="roundRect">
+            <a:avLst>
+              <a:gd name="adj" fmla="val 8433"/>
+            </a:avLst>
+          </a:prstGeom>
+          <a:solidFill>
+            <a:srgbClr val="1E293B"/>
+          </a:solidFill>
+          <a:ln>
+            <a:noFill/>
+          </a:ln>
+          <a:effectLst/>
+        </p:spPr>
+        <p:style>
+          <a:lnRef idx="1">
+            <a:schemeClr val="accent1"/>
+          </a:lnRef>
+          <a:fillRef idx="3">
+            <a:schemeClr val="accent1"/>
+          </a:fillRef>
+          <a:effectRef idx="2">
+            <a:schemeClr val="accent1"/>
+          </a:effectRef>
+          <a:fontRef idx="minor">
+            <a:schemeClr val="lt1"/>
+          </a:fontRef>
+        </p:style>
+        <p:txBody>
+          <a:bodyPr rtlCol="0" anchor="ctr"/>
+          <a:lstStyle/>
+          <a:p>
+            <a:pPr algn="ctr"/>
+            <a:endParaRPr/>
+          </a:p>
+        </p:txBody>
+      </p:sp>
+      <p:sp>
+        <p:nvSpPr>
+          <p:cNvPr id="17" name="Hallazgo title"/>
+          <p:cNvSpPr txBox="1"/>
+          <p:nvPr/>
+        </p:nvSpPr>
+        <p:spPr>
+          <a:xfrm>
+            <a:off x="875081" y="4553712"/>
+            <a:ext cx="6702552" cy="265176"/>
+          </a:xfrm>
+          <a:prstGeom prst="rect">
+            <a:avLst/>
+          </a:prstGeom>
+          <a:noFill/>
+        </p:spPr>
+        <p:txBody>
+          <a:bodyPr wrap="none" lIns="0" tIns="0" rIns="0" bIns="0" anchor="t">
+            <a:spAutoFit/>
+          </a:bodyPr>
+          <a:lstStyle/>
+          <a:p>
+            <a:pPr algn="l"/>
+            <a:r>
+              <a:rPr sz="1650" b="1" i="0" u="none">
+                <a:solidFill>
+                  <a:srgbClr val="F8FAFC"/>
+                </a:solidFill>
+                <a:latin typeface="Space Grotesk"/>
+              </a:rPr>
+              <a:t>Hallazgo con el caso real</a:t>
+            </a:r>
+          </a:p>
+        </p:txBody>
+      </p:sp>
+      <p:sp>
+        <p:nvSpPr>
+          <p:cNvPr id="18" name="Hallazgo body"/>
+          <p:cNvSpPr txBox="1"/>
+          <p:nvPr/>
+        </p:nvSpPr>
+        <p:spPr>
+          <a:xfrm>
+            <a:off x="875081" y="4919472"/>
+            <a:ext cx="6702552" cy="914400"/>
+          </a:xfrm>
+          <a:prstGeom prst="rect">
+            <a:avLst/>
+          </a:prstGeom>
+          <a:noFill/>
+        </p:spPr>
+        <p:txBody>
+          <a:bodyPr wrap="square" lIns="0" tIns="0" rIns="0" bIns="0" anchor="t">
+            <a:spAutoFit/>
+          </a:bodyPr>
+          <a:lstStyle/>
+          <a:p>
+            <a:pPr algn="l"/>
+            <a:r>
+              <a:rPr sz="1350" b="0" i="0" u="none">
+                <a:solidFill>
+                  <a:srgbClr val="CBD5E1"/>
+                </a:solidFill>
+                <a:latin typeface="DM Sans"/>
+              </a:rPr>
+              <a:t>Los 3 planes usan los 7 días: ninguno dejó el día de descanso. Esa restricción, escrita en texto libre, no la verifica ninguna tool. Además, el Plan B cubre solo el 79 % de las horas de la Tesis.</a:t>
+            </a:r>
+          </a:p>
+        </p:txBody>
+      </p:sp>
+      <p:sp>
+        <p:nvSpPr>
+          <p:cNvPr id="19" name="Demo card"/>
+          <p:cNvSpPr/>
+          <p:nvPr/>
+        </p:nvSpPr>
+        <p:spPr>
+          <a:xfrm>
+            <a:off x="8076895" y="4315968"/>
+            <a:ext cx="3502152" cy="1691640"/>
+          </a:xfrm>
+          <a:prstGeom prst="roundRect">
+            <a:avLst>
+              <a:gd name="adj" fmla="val 8433"/>
+            </a:avLst>
+          </a:prstGeom>
+          <a:solidFill>
+            <a:srgbClr val="1E293B"/>
+          </a:solidFill>
+          <a:ln>
+            <a:noFill/>
+          </a:ln>
+          <a:effectLst/>
+        </p:spPr>
+        <p:style>
+          <a:lnRef idx="1">
+            <a:schemeClr val="accent1"/>
+          </a:lnRef>
+          <a:fillRef idx="3">
+            <a:schemeClr val="accent1"/>
+          </a:fillRef>
+          <a:effectRef idx="2">
+            <a:schemeClr val="accent1"/>
+          </a:effectRef>
+          <a:fontRef idx="minor">
+            <a:schemeClr val="lt1"/>
+          </a:fontRef>
+        </p:style>
+        <p:txBody>
+          <a:bodyPr rtlCol="0" anchor="ctr"/>
+          <a:lstStyle/>
+          <a:p>
+            <a:pPr algn="ctr"/>
+            <a:endParaRPr/>
+          </a:p>
+        </p:txBody>
+      </p:sp>
+      <p:sp>
+        <p:nvSpPr>
+          <p:cNvPr id="20" name="Demo title"/>
+          <p:cNvSpPr txBox="1"/>
+          <p:nvPr/>
+        </p:nvSpPr>
+        <p:spPr>
+          <a:xfrm>
+            <a:off x="8342071" y="4553712"/>
+            <a:ext cx="2971800" cy="265176"/>
+          </a:xfrm>
+          <a:prstGeom prst="rect">
+            <a:avLst/>
+          </a:prstGeom>
+          <a:noFill/>
+        </p:spPr>
+        <p:txBody>
+          <a:bodyPr wrap="none" lIns="0" tIns="0" rIns="0" bIns="0" anchor="t">
+            <a:spAutoFit/>
+          </a:bodyPr>
+          <a:lstStyle/>
+          <a:p>
+            <a:pPr algn="l"/>
+            <a:r>
+              <a:rPr sz="1650" b="1" i="0" u="none">
+                <a:solidFill>
+                  <a:srgbClr val="F8FAFC"/>
+                </a:solidFill>
+                <a:latin typeface="Space Grotesk"/>
+              </a:rPr>
+              <a:t>Demo en vivo</a:t>
+            </a:r>
+          </a:p>
+        </p:txBody>
+      </p:sp>
+      <p:sp>
+        <p:nvSpPr>
+          <p:cNvPr id="21" name="Demo body"/>
+          <p:cNvSpPr txBox="1"/>
+          <p:nvPr/>
+        </p:nvSpPr>
+        <p:spPr>
+          <a:xfrm>
+            <a:off x="8342071" y="4919472"/>
+            <a:ext cx="2971800" cy="914400"/>
+          </a:xfrm>
+          <a:prstGeom prst="rect">
+            <a:avLst/>
+          </a:prstGeom>
+          <a:noFill/>
+        </p:spPr>
+        <p:txBody>
+          <a:bodyPr wrap="square" lIns="0" tIns="0" rIns="0" bIns="0" anchor="t">
+            <a:spAutoFit/>
+          </a:bodyPr>
+          <a:lstStyle/>
+          <a:p>
+            <a:pPr algn="l"/>
+            <a:r>
+              <a:rPr sz="1350" b="0" i="0" u="none">
+                <a:solidFill>
+                  <a:srgbClr val="CBD5E1"/>
+                </a:solidFill>
+                <a:latin typeface="DM Sans"/>
+              </a:rPr>
+              <a:t>El otro equipo dicta los 5 inputs; corren los 4 agentes y se ven las tools ejecutadas y el plan recomendado.</a:t>
             </a:r>
           </a:p>
         </p:txBody>
@@ -4752,7 +4986,7 @@
                 </a:solidFill>
                 <a:latin typeface="DM Sans"/>
               </a:rPr>
-              <a:t>42.0h</a:t>
+              <a:t>44.0h</a:t>
             </a:r>
             <a:r>
               <a:rPr sz="1350" b="0" i="0" u="none">
@@ -5541,8 +5775,8 @@
         </p:nvSpPr>
         <p:spPr>
           <a:xfrm>
-            <a:off x="609600" y="2262187"/>
-            <a:ext cx="5295900" cy="3493008"/>
+            <a:off x="609600" y="1951291"/>
+            <a:ext cx="5295900" cy="3895344"/>
           </a:xfrm>
           <a:prstGeom prst="roundRect">
             <a:avLst>
@@ -5639,7 +5873,7 @@
         </p:nvSpPr>
         <p:spPr>
           <a:xfrm>
-            <a:off x="923925" y="3671887"/>
+            <a:off x="923925" y="3360991"/>
             <a:ext cx="4667250" cy="495300"/>
           </a:xfrm>
           <a:prstGeom prst="roundRect">
@@ -5694,7 +5928,7 @@
         </p:blipFill>
         <p:spPr>
           <a:xfrm>
-            <a:off x="923925" y="2605087"/>
+            <a:off x="923925" y="2294191"/>
             <a:ext cx="171450" cy="228600"/>
           </a:xfrm>
           <a:prstGeom prst="rect">
@@ -5858,7 +6092,7 @@
         </p:nvSpPr>
         <p:spPr>
           <a:xfrm>
-            <a:off x="923925" y="2576512"/>
+            <a:off x="923925" y="2265616"/>
             <a:ext cx="6125765" cy="295275"/>
           </a:xfrm>
           <a:prstGeom prst="rect">
@@ -5893,7 +6127,7 @@
         </p:nvSpPr>
         <p:spPr>
           <a:xfrm>
-            <a:off x="923925" y="3043237"/>
+            <a:off x="923925" y="2732341"/>
             <a:ext cx="4762500" cy="457200"/>
           </a:xfrm>
           <a:prstGeom prst="rect">
@@ -5998,7 +6232,7 @@
         </p:nvSpPr>
         <p:spPr>
           <a:xfrm>
-            <a:off x="1076325" y="3824287"/>
+            <a:off x="1076325" y="3513391"/>
             <a:ext cx="5453062" cy="190500"/>
           </a:xfrm>
           <a:prstGeom prst="rect">
@@ -6033,7 +6267,7 @@
         </p:nvSpPr>
         <p:spPr>
           <a:xfrm>
-            <a:off x="923925" y="4640389"/>
+            <a:off x="923925" y="4818888"/>
             <a:ext cx="5834062" cy="228600"/>
           </a:xfrm>
           <a:prstGeom prst="rect">
@@ -6077,7 +6311,7 @@
         </p:nvSpPr>
         <p:spPr>
           <a:xfrm>
-            <a:off x="923925" y="4964239"/>
+            <a:off x="923925" y="5120640"/>
             <a:ext cx="5834062" cy="228600"/>
           </a:xfrm>
           <a:prstGeom prst="rect">
@@ -6121,7 +6355,7 @@
         </p:nvSpPr>
         <p:spPr>
           <a:xfrm>
-            <a:off x="923925" y="5288089"/>
+            <a:off x="923925" y="5422392"/>
             <a:ext cx="5834062" cy="228600"/>
           </a:xfrm>
           <a:prstGeom prst="rect">
@@ -6335,13 +6569,135 @@
       </p:sp>
       <p:sp>
         <p:nvSpPr>
-          <p:cNvPr id="21" name="Caption pesos"/>
+          <p:cNvPr id="21" name="Leyenda formula"/>
           <p:cNvSpPr txBox="1"/>
           <p:nvPr/>
         </p:nvSpPr>
         <p:spPr>
           <a:xfrm>
-            <a:off x="923544" y="4334256"/>
+            <a:off x="923544" y="3931920"/>
+            <a:ext cx="4663440" cy="566928"/>
+          </a:xfrm>
+          <a:prstGeom prst="rect">
+            <a:avLst/>
+          </a:prstGeom>
+          <a:noFill/>
+        </p:spPr>
+        <p:txBody>
+          <a:bodyPr wrap="square" lIns="0" tIns="0" rIns="0" bIns="0" anchor="t">
+            <a:spAutoFit/>
+          </a:bodyPr>
+          <a:lstStyle/>
+          <a:p>
+            <a:pPr algn="l"/>
+            <a:r>
+              <a:rPr sz="1100" b="1" i="0" u="none">
+                <a:solidFill>
+                  <a:srgbClr val="334155"/>
+                </a:solidFill>
+                <a:latin typeface="DM Sans"/>
+              </a:rPr>
+              <a:t>Cr</a:t>
+            </a:r>
+            <a:r>
+              <a:rPr sz="1100" b="0" i="0" u="none">
+                <a:solidFill>
+                  <a:srgbClr val="64748B"/>
+                </a:solidFill>
+                <a:latin typeface="DM Sans"/>
+              </a:rPr>
+              <a:t xml:space="preserve"> = créditos · </a:t>
+            </a:r>
+            <a:r>
+              <a:rPr sz="1100" b="1" i="0" u="none">
+                <a:solidFill>
+                  <a:srgbClr val="334155"/>
+                </a:solidFill>
+                <a:latin typeface="DM Sans"/>
+              </a:rPr>
+              <a:t>1.5</a:t>
+            </a:r>
+            <a:r>
+              <a:rPr sz="1100" b="0" i="0" u="none">
+                <a:solidFill>
+                  <a:srgbClr val="64748B"/>
+                </a:solidFill>
+                <a:latin typeface="DM Sans"/>
+              </a:rPr>
+              <a:t xml:space="preserve"> = horas/semana por crédito</a:t>
+            </a:r>
+          </a:p>
+          <a:p>
+            <a:pPr algn="l"/>
+            <a:r>
+              <a:rPr sz="1100" b="1" i="0" u="none">
+                <a:solidFill>
+                  <a:srgbClr val="334155"/>
+                </a:solidFill>
+                <a:latin typeface="DM Sans"/>
+              </a:rPr>
+              <a:t>F_dif</a:t>
+            </a:r>
+            <a:r>
+              <a:rPr sz="1100" b="0" i="0" u="none">
+                <a:solidFill>
+                  <a:srgbClr val="64748B"/>
+                </a:solidFill>
+                <a:latin typeface="DM Sans"/>
+              </a:rPr>
+              <a:t xml:space="preserve"> = dificultad (0.8–1.5) · </a:t>
+            </a:r>
+            <a:r>
+              <a:rPr sz="1100" b="1" i="0" u="none">
+                <a:solidFill>
+                  <a:srgbClr val="334155"/>
+                </a:solidFill>
+                <a:latin typeface="DM Sans"/>
+              </a:rPr>
+              <a:t>F_urg</a:t>
+            </a:r>
+            <a:r>
+              <a:rPr sz="1100" b="0" i="0" u="none">
+                <a:solidFill>
+                  <a:srgbClr val="64748B"/>
+                </a:solidFill>
+                <a:latin typeface="DM Sans"/>
+              </a:rPr>
+              <a:t xml:space="preserve"> = urgencia (1–1.5)</a:t>
+            </a:r>
+          </a:p>
+          <a:p>
+            <a:pPr algn="l"/>
+            <a:r>
+              <a:rPr sz="1100" b="1" i="0" u="none">
+                <a:solidFill>
+                  <a:srgbClr val="334155"/>
+                </a:solidFill>
+                <a:latin typeface="DM Sans"/>
+              </a:rPr>
+              <a:t>F_pri</a:t>
+            </a:r>
+            <a:r>
+              <a:rPr sz="1100" b="0" i="0" u="none">
+                <a:solidFill>
+                  <a:srgbClr val="64748B"/>
+                </a:solidFill>
+                <a:latin typeface="DM Sans"/>
+              </a:rPr>
+              <a:t xml:space="preserve"> = ×1.2 si el curso es prioritario</a:t>
+            </a:r>
+          </a:p>
+        </p:txBody>
+      </p:sp>
+      <p:sp>
+        <p:nvSpPr>
+          <p:cNvPr id="22" name="Caption pesos"/>
+          <p:cNvSpPr txBox="1"/>
+          <p:nvPr/>
+        </p:nvSpPr>
+        <p:spPr>
+          <a:xfrm>
+            <a:off x="923544" y="4553712"/>
             <a:ext cx="4663440" cy="201168"/>
           </a:xfrm>
           <a:prstGeom prst="rect">
@@ -6510,7 +6866,7 @@
                 </a:solidFill>
                 <a:latin typeface="DM Sans"/>
               </a:rPr>
-              <a:t>trabaja full time de lunes a viernes y casi todo su tiempo libre está en el fin de semana</a:t>
+              <a:t>trabaja full time de lunes a viernes y dos tercios de su tiempo libre están en el fin de semana</a:t>
             </a:r>
           </a:p>
         </p:txBody>
@@ -7420,7 +7776,7 @@
                 </a:solidFill>
                 <a:latin typeface="JetBrains Mono"/>
               </a:rPr>
-              <a:t xml:space="preserve">   42 h libres/sem</a:t>
+              <a:t xml:space="preserve">   44 h libres/sem</a:t>
             </a:r>
           </a:p>
         </p:txBody>
@@ -7909,7 +8265,7 @@
                 </a:solidFill>
                 <a:latin typeface="DM Sans"/>
               </a:rPr>
-              <a:t>Tesis 10.8 h · 3D Graphics 6.0 h · Planificación IA 4.8 h  —  Libres: 42 h (Vie 0 h, Sáb y Dom 15 h c/u)</a:t>
+              <a:t>Tesis 10.8 h · 3D Graphics 6.0 h · Planificación IA 4.8 h  —  Libres: 44 h (Sáb y Dom 15 h c/u)</a:t>
             </a:r>
           </a:p>
         </p:txBody>
@@ -7981,7 +8337,7 @@
           <a:p>
             <a:pPr algn="l"/>
             <a:r>
-              <a:rPr lang="es-PE" sz="1050" b="1" i="0" u="none" dirty="0">
+              <a:rPr lang="es-PE" sz="1050" b="1" i="0" u="none">
                 <a:solidFill>
                   <a:srgbClr val="2563EB"/>
                 </a:solidFill>
@@ -8016,7 +8372,7 @@
           <a:p>
             <a:pPr algn="l"/>
             <a:r>
-              <a:rPr lang="es-PE" sz="1800" b="1" i="0" u="none" dirty="0">
+              <a:rPr lang="es-PE" sz="1800" b="1" i="0" u="none">
                 <a:solidFill>
                   <a:srgbClr val="0F172A"/>
                 </a:solidFill>
@@ -8051,13 +8407,13 @@
           <a:p>
             <a:pPr algn="l"/>
             <a:r>
-              <a:rPr lang="es-PE" sz="1100" b="0" i="1" u="none" dirty="0">
+              <a:rPr lang="es-PE" sz="1100" b="0" i="1" u="none">
                 <a:solidFill>
                   <a:srgbClr val="475569"/>
                 </a:solidFill>
                 <a:latin typeface="DM Sans"/>
               </a:rPr>
-              <a:t>Todo el tiempo libre, foco en la Tesis</a:t>
+              <a:t>Llena los días laborales, foco en la Tesis</a:t>
             </a:r>
           </a:p>
         </p:txBody>
@@ -8090,7 +8446,7 @@
               </a:spcAft>
             </a:pPr>
             <a:r>
-              <a:rPr lang="es-PE" sz="1350" b="1" i="0" u="none" dirty="0">
+              <a:rPr lang="es-PE" sz="1350" b="1" i="0" u="none">
                 <a:solidFill>
                   <a:srgbClr val="0F172A"/>
                 </a:solidFill>
@@ -8099,25 +8455,25 @@
               <a:t>Tesis</a:t>
             </a:r>
             <a:r>
-              <a:rPr lang="es-PE" sz="1350" b="1" i="0" u="none" dirty="0">
+              <a:rPr lang="es-PE" sz="1350" b="1" i="0" u="none">
                 <a:solidFill>
                   <a:srgbClr val="2563EB"/>
                 </a:solidFill>
                 <a:latin typeface="DM Sans"/>
               </a:rPr>
-              <a:t xml:space="preserve">  ·  18 h</a:t>
+              <a:t xml:space="preserve">  ·  12 h</a:t>
             </a:r>
           </a:p>
           <a:p>
             <a:pPr algn="l"/>
             <a:r>
-              <a:rPr lang="es-PE" sz="1200" b="0" i="0" u="none" dirty="0">
+              <a:rPr lang="es-PE" sz="1200" b="0" i="0" u="none">
                 <a:solidFill>
                   <a:srgbClr val="334155"/>
                 </a:solidFill>
                 <a:latin typeface="DM Sans"/>
               </a:rPr>
-              <a:t>Lun y Mar 3 h · Sáb y Dom 6 h</a:t>
+              <a:t>Lun y Mar 3 h · Mié, Jue y Vie 2 h</a:t>
             </a:r>
           </a:p>
         </p:txBody>
@@ -8150,7 +8506,7 @@
               </a:spcAft>
             </a:pPr>
             <a:r>
-              <a:rPr lang="es-PE" sz="1350" b="1" i="0" u="none" dirty="0">
+              <a:rPr lang="es-PE" sz="1350" b="1" i="0" u="none">
                 <a:solidFill>
                   <a:srgbClr val="0F172A"/>
                 </a:solidFill>
@@ -8159,7 +8515,7 @@
               <a:t>3D Graphics</a:t>
             </a:r>
             <a:r>
-              <a:rPr lang="es-PE" sz="1350" b="1" i="0" u="none" dirty="0">
+              <a:rPr lang="es-PE" sz="1350" b="1" i="0" u="none">
                 <a:solidFill>
                   <a:srgbClr val="2563EB"/>
                 </a:solidFill>
@@ -8171,13 +8527,13 @@
           <a:p>
             <a:pPr algn="l"/>
             <a:r>
-              <a:rPr lang="es-PE" sz="1200" b="0" i="0" u="none" dirty="0">
+              <a:rPr lang="es-PE" sz="1200" b="0" i="0" u="none">
                 <a:solidFill>
                   <a:srgbClr val="334155"/>
                 </a:solidFill>
                 <a:latin typeface="DM Sans"/>
               </a:rPr>
-              <a:t>Mié 2 h · Sáb y Dom 3 h</a:t>
+              <a:t>Lun y Mar 1 h · Sáb y Dom 3 h</a:t>
             </a:r>
           </a:p>
         </p:txBody>
@@ -8210,7 +8566,7 @@
               </a:spcAft>
             </a:pPr>
             <a:r>
-              <a:rPr lang="es-PE" sz="1350" b="1" i="0" u="none" dirty="0">
+              <a:rPr lang="es-PE" sz="1350" b="1" i="0" u="none">
                 <a:solidFill>
                   <a:srgbClr val="0F172A"/>
                 </a:solidFill>
@@ -8219,25 +8575,25 @@
               <a:t>Planificación IA</a:t>
             </a:r>
             <a:r>
-              <a:rPr lang="es-PE" sz="1350" b="1" i="0" u="none" dirty="0">
+              <a:rPr lang="es-PE" sz="1350" b="1" i="0" u="none">
                 <a:solidFill>
                   <a:srgbClr val="2563EB"/>
                 </a:solidFill>
                 <a:latin typeface="DM Sans"/>
               </a:rPr>
-              <a:t xml:space="preserve">  ·  8 h</a:t>
+              <a:t xml:space="preserve">  ·  4 h</a:t>
             </a:r>
           </a:p>
           <a:p>
             <a:pPr algn="l"/>
             <a:r>
-              <a:rPr lang="es-PE" sz="1200" b="0" i="0" u="none" dirty="0">
+              <a:rPr lang="es-PE" sz="1200" b="0" i="0" u="none">
                 <a:solidFill>
                   <a:srgbClr val="334155"/>
                 </a:solidFill>
                 <a:latin typeface="DM Sans"/>
               </a:rPr>
-              <a:t>Jue 2 h · Sáb y Dom 3 h</a:t>
+              <a:t>Sáb y Dom 2 h</a:t>
             </a:r>
           </a:p>
         </p:txBody>
@@ -8259,7 +8615,7 @@
             </a:avLst>
           </a:prstGeom>
           <a:solidFill>
-            <a:srgbClr val="FEE2E2"/>
+            <a:srgbClr val="DBEAFE"/>
           </a:solidFill>
           <a:ln>
             <a:noFill/>
@@ -8276,11 +8632,11 @@
             <a:r>
               <a:rPr lang="es-PE" sz="1150" b="1" i="0" u="none">
                 <a:solidFill>
-                  <a:srgbClr val="B91C1C"/>
-                </a:solidFill>
-                <a:latin typeface="DM Sans"/>
-              </a:rPr>
-              <a:t>34 h · No factible: 2 bloques de 6 h</a:t>
+                  <a:srgbClr val="1D4ED8"/>
+                </a:solidFill>
+                <a:latin typeface="DM Sans"/>
+              </a:rPr>
+              <a:t>24 h · Factible · sobrecarga alta</a:t>
             </a:r>
           </a:p>
         </p:txBody>
@@ -8294,6 +8650,377 @@
         <p:spPr>
           <a:xfrm>
             <a:off x="4358670" y="1755648"/>
+            <a:ext cx="3474720" cy="3977640"/>
+          </a:xfrm>
+          <a:prstGeom prst="roundRect">
+            <a:avLst>
+              <a:gd name="adj" fmla="val 5000"/>
+            </a:avLst>
+          </a:prstGeom>
+          <a:solidFill>
+            <a:srgbClr val="F0FDF4"/>
+          </a:solidFill>
+          <a:ln w="9525">
+            <a:solidFill>
+              <a:srgbClr val="86EFAC"/>
+            </a:solidFill>
+          </a:ln>
+          <a:effectLst>
+            <a:outerShdw blurRad="76200" dist="19050" dir="5400000" algn="t" rotWithShape="0">
+              <a:srgbClr val="0F172A">
+                <a:alpha val="10000"/>
+              </a:srgbClr>
+            </a:outerShdw>
+          </a:effectLst>
+        </p:spPr>
+        <p:txBody>
+          <a:bodyPr rtlCol="0" lIns="0" tIns="0" rIns="0" bIns="0" anchor="ctr">
+            <a:noAutofit/>
+          </a:bodyPr>
+          <a:lstStyle/>
+          <a:p>
+            <a:pPr algn="ctr"/>
+            <a:endParaRPr lang="es-PE"/>
+          </a:p>
+        </p:txBody>
+      </p:sp>
+      <p:sp>
+        <p:nvSpPr>
+          <p:cNvPr id="14" name="TextBox 14"/>
+          <p:cNvSpPr txBox="1"/>
+          <p:nvPr/>
+        </p:nvSpPr>
+        <p:spPr>
+          <a:xfrm>
+            <a:off x="4587270" y="1938528"/>
+            <a:ext cx="3017520" cy="182880"/>
+          </a:xfrm>
+          <a:prstGeom prst="rect">
+            <a:avLst/>
+          </a:prstGeom>
+          <a:noFill/>
+        </p:spPr>
+        <p:txBody>
+          <a:bodyPr wrap="square" lIns="0" tIns="0" rIns="0" bIns="0" anchor="t">
+            <a:noAutofit/>
+          </a:bodyPr>
+          <a:lstStyle/>
+          <a:p>
+            <a:pPr algn="l"/>
+            <a:r>
+              <a:rPr lang="es-PE" sz="1050" b="1" i="0" u="none">
+                <a:solidFill>
+                  <a:srgbClr val="16A34A"/>
+                </a:solidFill>
+                <a:latin typeface="JetBrains Mono"/>
+              </a:rPr>
+              <a:t>PLAN B  ✓ ELEGIDO</a:t>
+            </a:r>
+          </a:p>
+        </p:txBody>
+      </p:sp>
+      <p:sp>
+        <p:nvSpPr>
+          <p:cNvPr id="15" name="TextBox 15"/>
+          <p:cNvSpPr txBox="1"/>
+          <p:nvPr/>
+        </p:nvSpPr>
+        <p:spPr>
+          <a:xfrm>
+            <a:off x="4587270" y="2157984"/>
+            <a:ext cx="3017520" cy="329184"/>
+          </a:xfrm>
+          <a:prstGeom prst="rect">
+            <a:avLst/>
+          </a:prstGeom>
+          <a:noFill/>
+        </p:spPr>
+        <p:txBody>
+          <a:bodyPr wrap="square" lIns="0" tIns="0" rIns="0" bIns="0" anchor="t">
+            <a:noAutofit/>
+          </a:bodyPr>
+          <a:lstStyle/>
+          <a:p>
+            <a:pPr algn="l"/>
+            <a:r>
+              <a:rPr lang="es-PE" sz="1800" b="1" i="0" u="none">
+                <a:solidFill>
+                  <a:srgbClr val="0F172A"/>
+                </a:solidFill>
+                <a:latin typeface="Space Grotesk"/>
+              </a:rPr>
+              <a:t>Carga pareja</a:t>
+            </a:r>
+          </a:p>
+        </p:txBody>
+      </p:sp>
+      <p:sp>
+        <p:nvSpPr>
+          <p:cNvPr id="16" name="TextBox 16"/>
+          <p:cNvSpPr txBox="1"/>
+          <p:nvPr/>
+        </p:nvSpPr>
+        <p:spPr>
+          <a:xfrm>
+            <a:off x="4587270" y="2523744"/>
+            <a:ext cx="3017520" cy="219456"/>
+          </a:xfrm>
+          <a:prstGeom prst="rect">
+            <a:avLst/>
+          </a:prstGeom>
+          <a:noFill/>
+        </p:spPr>
+        <p:txBody>
+          <a:bodyPr wrap="square" lIns="0" tIns="0" rIns="0" bIns="0" anchor="t">
+            <a:noAutofit/>
+          </a:bodyPr>
+          <a:lstStyle/>
+          <a:p>
+            <a:pPr algn="l"/>
+            <a:r>
+              <a:rPr lang="es-PE" sz="1100" b="0" i="1" u="none">
+                <a:solidFill>
+                  <a:srgbClr val="475569"/>
+                </a:solidFill>
+                <a:latin typeface="DM Sans"/>
+              </a:rPr>
+              <a:t>Deja margen libre todos los días</a:t>
+            </a:r>
+          </a:p>
+        </p:txBody>
+      </p:sp>
+      <p:sp>
+        <p:nvSpPr>
+          <p:cNvPr id="17" name="TextBox 17"/>
+          <p:cNvSpPr txBox="1"/>
+          <p:nvPr/>
+        </p:nvSpPr>
+        <p:spPr>
+          <a:xfrm>
+            <a:off x="4587270" y="2816352"/>
+            <a:ext cx="3017520" cy="566928"/>
+          </a:xfrm>
+          <a:prstGeom prst="rect">
+            <a:avLst/>
+          </a:prstGeom>
+          <a:noFill/>
+        </p:spPr>
+        <p:txBody>
+          <a:bodyPr wrap="square" lIns="0" tIns="0" rIns="0" bIns="0" anchor="t">
+            <a:noAutofit/>
+          </a:bodyPr>
+          <a:lstStyle/>
+          <a:p>
+            <a:pPr algn="l">
+              <a:spcAft>
+                <a:spcPts val="200"/>
+              </a:spcAft>
+            </a:pPr>
+            <a:r>
+              <a:rPr lang="es-PE" sz="1350" b="1" i="0" u="none">
+                <a:solidFill>
+                  <a:srgbClr val="0F172A"/>
+                </a:solidFill>
+                <a:latin typeface="DM Sans"/>
+              </a:rPr>
+              <a:t>Tesis</a:t>
+            </a:r>
+            <a:r>
+              <a:rPr lang="es-PE" sz="1350" b="1" i="0" u="none">
+                <a:solidFill>
+                  <a:srgbClr val="16A34A"/>
+                </a:solidFill>
+                <a:latin typeface="DM Sans"/>
+              </a:rPr>
+              <a:t xml:space="preserve">  ·  8.5 h</a:t>
+            </a:r>
+          </a:p>
+          <a:p>
+            <a:pPr algn="l"/>
+            <a:r>
+              <a:rPr lang="es-PE" sz="1200" b="0" i="0" u="none">
+                <a:solidFill>
+                  <a:srgbClr val="334155"/>
+                </a:solidFill>
+                <a:latin typeface="DM Sans"/>
+              </a:rPr>
+              <a:t>Lun y Mar 2 h · Mié, Jue y Vie 1.5 h</a:t>
+            </a:r>
+          </a:p>
+        </p:txBody>
+      </p:sp>
+      <p:sp>
+        <p:nvSpPr>
+          <p:cNvPr id="18" name="TextBox 18"/>
+          <p:cNvSpPr txBox="1"/>
+          <p:nvPr/>
+        </p:nvSpPr>
+        <p:spPr>
+          <a:xfrm>
+            <a:off x="4587270" y="3401568"/>
+            <a:ext cx="3017520" cy="566928"/>
+          </a:xfrm>
+          <a:prstGeom prst="rect">
+            <a:avLst/>
+          </a:prstGeom>
+          <a:noFill/>
+        </p:spPr>
+        <p:txBody>
+          <a:bodyPr wrap="square" lIns="0" tIns="0" rIns="0" bIns="0" anchor="t">
+            <a:noAutofit/>
+          </a:bodyPr>
+          <a:lstStyle/>
+          <a:p>
+            <a:pPr algn="l">
+              <a:spcAft>
+                <a:spcPts val="200"/>
+              </a:spcAft>
+            </a:pPr>
+            <a:r>
+              <a:rPr lang="es-PE" sz="1350" b="1" i="0" u="none">
+                <a:solidFill>
+                  <a:srgbClr val="0F172A"/>
+                </a:solidFill>
+                <a:latin typeface="DM Sans"/>
+              </a:rPr>
+              <a:t>3D Graphics</a:t>
+            </a:r>
+            <a:r>
+              <a:rPr lang="es-PE" sz="1350" b="1" i="0" u="none">
+                <a:solidFill>
+                  <a:srgbClr val="16A34A"/>
+                </a:solidFill>
+                <a:latin typeface="DM Sans"/>
+              </a:rPr>
+              <a:t xml:space="preserve">  ·  8 h</a:t>
+            </a:r>
+          </a:p>
+          <a:p>
+            <a:pPr algn="l"/>
+            <a:r>
+              <a:rPr lang="es-PE" sz="1200" b="0" i="0" u="none">
+                <a:solidFill>
+                  <a:srgbClr val="334155"/>
+                </a:solidFill>
+                <a:latin typeface="DM Sans"/>
+              </a:rPr>
+              <a:t>Lun y Mar 1.5 h · Sáb y Dom 2.5 h</a:t>
+            </a:r>
+          </a:p>
+        </p:txBody>
+      </p:sp>
+      <p:sp>
+        <p:nvSpPr>
+          <p:cNvPr id="19" name="TextBox 19"/>
+          <p:cNvSpPr txBox="1"/>
+          <p:nvPr/>
+        </p:nvSpPr>
+        <p:spPr>
+          <a:xfrm>
+            <a:off x="4587270" y="3986784"/>
+            <a:ext cx="3017520" cy="566928"/>
+          </a:xfrm>
+          <a:prstGeom prst="rect">
+            <a:avLst/>
+          </a:prstGeom>
+          <a:noFill/>
+        </p:spPr>
+        <p:txBody>
+          <a:bodyPr wrap="square" lIns="0" tIns="0" rIns="0" bIns="0" anchor="t">
+            <a:noAutofit/>
+          </a:bodyPr>
+          <a:lstStyle/>
+          <a:p>
+            <a:pPr algn="l">
+              <a:spcAft>
+                <a:spcPts val="200"/>
+              </a:spcAft>
+            </a:pPr>
+            <a:r>
+              <a:rPr lang="es-PE" sz="1350" b="1" i="0" u="none">
+                <a:solidFill>
+                  <a:srgbClr val="0F172A"/>
+                </a:solidFill>
+                <a:latin typeface="DM Sans"/>
+              </a:rPr>
+              <a:t>Planificación IA</a:t>
+            </a:r>
+            <a:r>
+              <a:rPr lang="es-PE" sz="1350" b="1" i="0" u="none">
+                <a:solidFill>
+                  <a:srgbClr val="16A34A"/>
+                </a:solidFill>
+                <a:latin typeface="DM Sans"/>
+              </a:rPr>
+              <a:t xml:space="preserve">  ·  4 h</a:t>
+            </a:r>
+          </a:p>
+          <a:p>
+            <a:pPr algn="l"/>
+            <a:r>
+              <a:rPr lang="es-PE" sz="1200" b="0" i="0" u="none">
+                <a:solidFill>
+                  <a:srgbClr val="334155"/>
+                </a:solidFill>
+                <a:latin typeface="DM Sans"/>
+              </a:rPr>
+              <a:t>Sáb y Dom 2 h</a:t>
+            </a:r>
+          </a:p>
+        </p:txBody>
+      </p:sp>
+      <p:sp>
+        <p:nvSpPr>
+          <p:cNvPr id="20" name="Badge 20"/>
+          <p:cNvSpPr/>
+          <p:nvPr/>
+        </p:nvSpPr>
+        <p:spPr>
+          <a:xfrm>
+            <a:off x="4587270" y="5276088"/>
+            <a:ext cx="3017520" cy="329184"/>
+          </a:xfrm>
+          <a:prstGeom prst="roundRect">
+            <a:avLst>
+              <a:gd name="adj" fmla="val 50000"/>
+            </a:avLst>
+          </a:prstGeom>
+          <a:solidFill>
+            <a:srgbClr val="DCFCE7"/>
+          </a:solidFill>
+          <a:ln>
+            <a:noFill/>
+          </a:ln>
+          <a:effectLst/>
+        </p:spPr>
+        <p:txBody>
+          <a:bodyPr rtlCol="0" lIns="0" tIns="0" rIns="0" bIns="0" anchor="ctr">
+            <a:noAutofit/>
+          </a:bodyPr>
+          <a:lstStyle/>
+          <a:p>
+            <a:pPr algn="ctr"/>
+            <a:r>
+              <a:rPr lang="es-PE" sz="1150" b="1" i="0" u="none">
+                <a:solidFill>
+                  <a:srgbClr val="15803D"/>
+                </a:solidFill>
+                <a:latin typeface="DM Sans"/>
+              </a:rPr>
+              <a:t>20.5 h · Factible · Plan elegido</a:t>
+            </a:r>
+          </a:p>
+        </p:txBody>
+      </p:sp>
+      <p:sp>
+        <p:nvSpPr>
+          <p:cNvPr id="21" name="Card 21"/>
+          <p:cNvSpPr/>
+          <p:nvPr/>
+        </p:nvSpPr>
+        <p:spPr>
+          <a:xfrm>
+            <a:off x="8107710" y="1755648"/>
             <a:ext cx="3474720" cy="3977640"/>
           </a:xfrm>
           <a:prstGeom prst="roundRect">
@@ -8330,13 +9057,13 @@
       </p:sp>
       <p:sp>
         <p:nvSpPr>
-          <p:cNvPr id="14" name="TextBox 14"/>
+          <p:cNvPr id="22" name="TextBox 22"/>
           <p:cNvSpPr txBox="1"/>
           <p:nvPr/>
         </p:nvSpPr>
         <p:spPr>
           <a:xfrm>
-            <a:off x="4587270" y="1938528"/>
+            <a:off x="8336310" y="1938528"/>
             <a:ext cx="3017520" cy="182880"/>
           </a:xfrm>
           <a:prstGeom prst="rect">
@@ -8352,26 +9079,26 @@
           <a:p>
             <a:pPr algn="l"/>
             <a:r>
-              <a:rPr lang="es-PE" sz="1050" b="1" i="0" u="none" dirty="0">
+              <a:rPr lang="es-PE" sz="1050" b="1" i="0" u="none">
                 <a:solidFill>
                   <a:srgbClr val="2563EB"/>
                 </a:solidFill>
                 <a:latin typeface="JetBrains Mono"/>
               </a:rPr>
-              <a:t>PLAN B</a:t>
-            </a:r>
-          </a:p>
-        </p:txBody>
-      </p:sp>
-      <p:sp>
-        <p:nvSpPr>
-          <p:cNvPr id="15" name="TextBox 15"/>
+              <a:t>PLAN C</a:t>
+            </a:r>
+          </a:p>
+        </p:txBody>
+      </p:sp>
+      <p:sp>
+        <p:nvSpPr>
+          <p:cNvPr id="23" name="TextBox 23"/>
           <p:cNvSpPr txBox="1"/>
           <p:nvPr/>
         </p:nvSpPr>
         <p:spPr>
           <a:xfrm>
-            <a:off x="4587270" y="2157984"/>
+            <a:off x="8336310" y="2157984"/>
             <a:ext cx="3017520" cy="329184"/>
           </a:xfrm>
           <a:prstGeom prst="rect">
@@ -8387,26 +9114,26 @@
           <a:p>
             <a:pPr algn="l"/>
             <a:r>
-              <a:rPr lang="es-PE" sz="1800" b="1" i="0" u="none" dirty="0">
+              <a:rPr lang="es-PE" sz="1800" b="1" i="0" u="none">
                 <a:solidFill>
                   <a:srgbClr val="0F172A"/>
                 </a:solidFill>
                 <a:latin typeface="Space Grotesk"/>
               </a:rPr>
-              <a:t>Equilibrado con colchón</a:t>
-            </a:r>
-          </a:p>
-        </p:txBody>
-      </p:sp>
-      <p:sp>
-        <p:nvSpPr>
-          <p:cNvPr id="16" name="TextBox 16"/>
+              <a:t>Bloques fin de semana</a:t>
+            </a:r>
+          </a:p>
+        </p:txBody>
+      </p:sp>
+      <p:sp>
+        <p:nvSpPr>
+          <p:cNvPr id="24" name="TextBox 24"/>
           <p:cNvSpPr txBox="1"/>
           <p:nvPr/>
         </p:nvSpPr>
         <p:spPr>
           <a:xfrm>
-            <a:off x="4587270" y="2523744"/>
+            <a:off x="8336310" y="2523744"/>
             <a:ext cx="3017520" cy="219456"/>
           </a:xfrm>
           <a:prstGeom prst="rect">
@@ -8422,26 +9149,26 @@
           <a:p>
             <a:pPr algn="l"/>
             <a:r>
-              <a:rPr lang="es-PE" sz="1100" b="0" i="1" u="none" dirty="0">
+              <a:rPr lang="es-PE" sz="1100" b="0" i="1" u="none">
                 <a:solidFill>
                   <a:srgbClr val="475569"/>
                 </a:solidFill>
                 <a:latin typeface="DM Sans"/>
               </a:rPr>
-              <a:t>Repartir todos los días con margen</a:t>
-            </a:r>
-          </a:p>
-        </p:txBody>
-      </p:sp>
-      <p:sp>
-        <p:nvSpPr>
-          <p:cNvPr id="17" name="TextBox 17"/>
+              <a:t>Bloques largos sáb/dom, semana ligera</a:t>
+            </a:r>
+          </a:p>
+        </p:txBody>
+      </p:sp>
+      <p:sp>
+        <p:nvSpPr>
+          <p:cNvPr id="25" name="TextBox 25"/>
           <p:cNvSpPr txBox="1"/>
           <p:nvPr/>
         </p:nvSpPr>
         <p:spPr>
           <a:xfrm>
-            <a:off x="4587270" y="2816352"/>
+            <a:off x="8336310" y="2816352"/>
             <a:ext cx="3017520" cy="566928"/>
           </a:xfrm>
           <a:prstGeom prst="rect">
@@ -8461,7 +9188,7 @@
               </a:spcAft>
             </a:pPr>
             <a:r>
-              <a:rPr lang="es-PE" sz="1350" b="1" i="0" u="none" dirty="0">
+              <a:rPr lang="es-PE" sz="1350" b="1" i="0" u="none">
                 <a:solidFill>
                   <a:srgbClr val="0F172A"/>
                 </a:solidFill>
@@ -8470,38 +9197,38 @@
               <a:t>Tesis</a:t>
             </a:r>
             <a:r>
-              <a:rPr lang="es-PE" sz="1350" b="1" i="0" u="none" dirty="0">
+              <a:rPr lang="es-PE" sz="1350" b="1" i="0" u="none">
                 <a:solidFill>
                   <a:srgbClr val="2563EB"/>
                 </a:solidFill>
                 <a:latin typeface="DM Sans"/>
               </a:rPr>
-              <a:t xml:space="preserve">  ·  13 h</a:t>
+              <a:t xml:space="preserve">  ·  12 h</a:t>
             </a:r>
           </a:p>
           <a:p>
             <a:pPr algn="l"/>
             <a:r>
-              <a:rPr lang="es-PE" sz="1200" b="0" i="0" u="none" dirty="0">
+              <a:rPr lang="es-PE" sz="1200" b="0" i="0" u="none">
                 <a:solidFill>
                   <a:srgbClr val="334155"/>
                 </a:solidFill>
                 <a:latin typeface="DM Sans"/>
               </a:rPr>
-              <a:t>Lun y Mar 2.5 h · Sáb y Dom 4 h</a:t>
-            </a:r>
-          </a:p>
-        </p:txBody>
-      </p:sp>
-      <p:sp>
-        <p:nvSpPr>
-          <p:cNvPr id="18" name="TextBox 18"/>
+              <a:t>Mié y Jue 1 h · Sáb y Dom 5 h</a:t>
+            </a:r>
+          </a:p>
+        </p:txBody>
+      </p:sp>
+      <p:sp>
+        <p:nvSpPr>
+          <p:cNvPr id="26" name="TextBox 26"/>
           <p:cNvSpPr txBox="1"/>
           <p:nvPr/>
         </p:nvSpPr>
         <p:spPr>
           <a:xfrm>
-            <a:off x="4587270" y="3401568"/>
+            <a:off x="8336310" y="3401568"/>
             <a:ext cx="3017520" cy="566928"/>
           </a:xfrm>
           <a:prstGeom prst="rect">
@@ -8521,7 +9248,7 @@
               </a:spcAft>
             </a:pPr>
             <a:r>
-              <a:rPr lang="es-PE" sz="1350" b="1" i="0" u="none" dirty="0">
+              <a:rPr lang="es-PE" sz="1350" b="1" i="0" u="none">
                 <a:solidFill>
                   <a:srgbClr val="0F172A"/>
                 </a:solidFill>
@@ -8530,38 +9257,38 @@
               <a:t>3D Graphics</a:t>
             </a:r>
             <a:r>
-              <a:rPr lang="es-PE" sz="1350" b="1" i="0" u="none" dirty="0">
+              <a:rPr lang="es-PE" sz="1350" b="1" i="0" u="none">
                 <a:solidFill>
                   <a:srgbClr val="2563EB"/>
                 </a:solidFill>
                 <a:latin typeface="DM Sans"/>
               </a:rPr>
-              <a:t xml:space="preserve">  ·  10 h</a:t>
+              <a:t xml:space="preserve">  ·  8 h</a:t>
             </a:r>
           </a:p>
           <a:p>
             <a:pPr algn="l"/>
             <a:r>
-              <a:rPr lang="es-PE" sz="1200" b="0" i="0" u="none" dirty="0">
+              <a:rPr lang="es-PE" sz="1200" b="0" i="0" u="none">
                 <a:solidFill>
                   <a:srgbClr val="334155"/>
                 </a:solidFill>
                 <a:latin typeface="DM Sans"/>
               </a:rPr>
-              <a:t>Mié y Jue 2 h · Sáb y Dom 3 h</a:t>
-            </a:r>
-          </a:p>
-        </p:txBody>
-      </p:sp>
-      <p:sp>
-        <p:nvSpPr>
-          <p:cNvPr id="19" name="TextBox 19"/>
+              <a:t>Lun y Mar 2 h · Sáb y Dom 2 h</a:t>
+            </a:r>
+          </a:p>
+        </p:txBody>
+      </p:sp>
+      <p:sp>
+        <p:nvSpPr>
+          <p:cNvPr id="27" name="TextBox 27"/>
           <p:cNvSpPr txBox="1"/>
           <p:nvPr/>
         </p:nvSpPr>
         <p:spPr>
           <a:xfrm>
-            <a:off x="4587270" y="3986784"/>
+            <a:off x="8336310" y="3986784"/>
             <a:ext cx="3017520" cy="566928"/>
           </a:xfrm>
           <a:prstGeom prst="rect">
@@ -8581,7 +9308,7 @@
               </a:spcAft>
             </a:pPr>
             <a:r>
-              <a:rPr lang="es-PE" sz="1350" b="1" i="0" u="none" dirty="0">
+              <a:rPr lang="es-PE" sz="1350" b="1" i="0" u="none">
                 <a:solidFill>
                   <a:srgbClr val="0F172A"/>
                 </a:solidFill>
@@ -8590,38 +9317,38 @@
               <a:t>Planificación IA</a:t>
             </a:r>
             <a:r>
-              <a:rPr lang="es-PE" sz="1350" b="1" i="0" u="none" dirty="0">
+              <a:rPr lang="es-PE" sz="1350" b="1" i="0" u="none">
                 <a:solidFill>
                   <a:srgbClr val="2563EB"/>
                 </a:solidFill>
                 <a:latin typeface="DM Sans"/>
               </a:rPr>
-              <a:t xml:space="preserve">  ·  8 h</a:t>
+              <a:t xml:space="preserve">  ·  5 h</a:t>
             </a:r>
           </a:p>
           <a:p>
             <a:pPr algn="l"/>
             <a:r>
-              <a:rPr lang="es-PE" sz="1200" b="0" i="0" u="none" dirty="0">
+              <a:rPr lang="es-PE" sz="1200" b="0" i="0" u="none">
                 <a:solidFill>
                   <a:srgbClr val="334155"/>
                 </a:solidFill>
                 <a:latin typeface="DM Sans"/>
               </a:rPr>
-              <a:t>Lun/Mar 1.5 · Mié/Jue 0.5 · Sáb/Dom 2 h</a:t>
-            </a:r>
-          </a:p>
-        </p:txBody>
-      </p:sp>
-      <p:sp>
-        <p:nvSpPr>
-          <p:cNvPr id="20" name="Badge 20"/>
+              <a:t>Vie 1 h · Sáb y Dom 2 h</a:t>
+            </a:r>
+          </a:p>
+        </p:txBody>
+      </p:sp>
+      <p:sp>
+        <p:nvSpPr>
+          <p:cNvPr id="28" name="Badge 28"/>
           <p:cNvSpPr/>
           <p:nvPr/>
         </p:nvSpPr>
         <p:spPr>
           <a:xfrm>
-            <a:off x="4587270" y="5276088"/>
+            <a:off x="8336310" y="5276088"/>
             <a:ext cx="3017520" cy="329184"/>
           </a:xfrm>
           <a:prstGeom prst="roundRect">
@@ -8651,378 +9378,7 @@
                 </a:solidFill>
                 <a:latin typeface="DM Sans"/>
               </a:rPr>
-              <a:t>31 h · No factible: 4 violaciones</a:t>
-            </a:r>
-          </a:p>
-        </p:txBody>
-      </p:sp>
-      <p:sp>
-        <p:nvSpPr>
-          <p:cNvPr id="21" name="Card 21"/>
-          <p:cNvSpPr/>
-          <p:nvPr/>
-        </p:nvSpPr>
-        <p:spPr>
-          <a:xfrm>
-            <a:off x="8107710" y="1755648"/>
-            <a:ext cx="3474720" cy="3977640"/>
-          </a:xfrm>
-          <a:prstGeom prst="roundRect">
-            <a:avLst>
-              <a:gd name="adj" fmla="val 5000"/>
-            </a:avLst>
-          </a:prstGeom>
-          <a:solidFill>
-            <a:srgbClr val="F0FDF4"/>
-          </a:solidFill>
-          <a:ln w="9525">
-            <a:solidFill>
-              <a:srgbClr val="86EFAC"/>
-            </a:solidFill>
-          </a:ln>
-          <a:effectLst>
-            <a:outerShdw blurRad="76200" dist="19050" dir="5400000" algn="t" rotWithShape="0">
-              <a:srgbClr val="0F172A">
-                <a:alpha val="10000"/>
-              </a:srgbClr>
-            </a:outerShdw>
-          </a:effectLst>
-        </p:spPr>
-        <p:txBody>
-          <a:bodyPr rtlCol="0" lIns="0" tIns="0" rIns="0" bIns="0" anchor="ctr">
-            <a:noAutofit/>
-          </a:bodyPr>
-          <a:lstStyle/>
-          <a:p>
-            <a:pPr algn="ctr"/>
-            <a:endParaRPr lang="es-PE"/>
-          </a:p>
-        </p:txBody>
-      </p:sp>
-      <p:sp>
-        <p:nvSpPr>
-          <p:cNvPr id="22" name="TextBox 22"/>
-          <p:cNvSpPr txBox="1"/>
-          <p:nvPr/>
-        </p:nvSpPr>
-        <p:spPr>
-          <a:xfrm>
-            <a:off x="8336310" y="1938528"/>
-            <a:ext cx="3017520" cy="182880"/>
-          </a:xfrm>
-          <a:prstGeom prst="rect">
-            <a:avLst/>
-          </a:prstGeom>
-          <a:noFill/>
-        </p:spPr>
-        <p:txBody>
-          <a:bodyPr wrap="square" lIns="0" tIns="0" rIns="0" bIns="0" anchor="t">
-            <a:noAutofit/>
-          </a:bodyPr>
-          <a:lstStyle/>
-          <a:p>
-            <a:pPr algn="l"/>
-            <a:r>
-              <a:rPr lang="es-PE" sz="1050" b="1" i="0" u="none" dirty="0">
-                <a:solidFill>
-                  <a:srgbClr val="16A34A"/>
-                </a:solidFill>
-                <a:latin typeface="JetBrains Mono"/>
-              </a:rPr>
-              <a:t>PLAN C  ✓ ELEGIDO</a:t>
-            </a:r>
-          </a:p>
-        </p:txBody>
-      </p:sp>
-      <p:sp>
-        <p:nvSpPr>
-          <p:cNvPr id="23" name="TextBox 23"/>
-          <p:cNvSpPr txBox="1"/>
-          <p:nvPr/>
-        </p:nvSpPr>
-        <p:spPr>
-          <a:xfrm>
-            <a:off x="8336310" y="2157984"/>
-            <a:ext cx="3017520" cy="329184"/>
-          </a:xfrm>
-          <a:prstGeom prst="rect">
-            <a:avLst/>
-          </a:prstGeom>
-          <a:noFill/>
-        </p:spPr>
-        <p:txBody>
-          <a:bodyPr wrap="square" lIns="0" tIns="0" rIns="0" bIns="0" anchor="t">
-            <a:noAutofit/>
-          </a:bodyPr>
-          <a:lstStyle/>
-          <a:p>
-            <a:pPr algn="l"/>
-            <a:r>
-              <a:rPr lang="es-PE" sz="1800" b="1" i="0" u="none" dirty="0">
-                <a:solidFill>
-                  <a:srgbClr val="0F172A"/>
-                </a:solidFill>
-                <a:latin typeface="Space Grotesk"/>
-              </a:rPr>
-              <a:t>Bloques fin de semana</a:t>
-            </a:r>
-          </a:p>
-        </p:txBody>
-      </p:sp>
-      <p:sp>
-        <p:nvSpPr>
-          <p:cNvPr id="24" name="TextBox 24"/>
-          <p:cNvSpPr txBox="1"/>
-          <p:nvPr/>
-        </p:nvSpPr>
-        <p:spPr>
-          <a:xfrm>
-            <a:off x="8336310" y="2523744"/>
-            <a:ext cx="3017520" cy="219456"/>
-          </a:xfrm>
-          <a:prstGeom prst="rect">
-            <a:avLst/>
-          </a:prstGeom>
-          <a:noFill/>
-        </p:spPr>
-        <p:txBody>
-          <a:bodyPr wrap="square" lIns="0" tIns="0" rIns="0" bIns="0" anchor="t">
-            <a:noAutofit/>
-          </a:bodyPr>
-          <a:lstStyle/>
-          <a:p>
-            <a:pPr algn="l"/>
-            <a:r>
-              <a:rPr lang="es-PE" sz="1100" b="0" i="1" u="none" dirty="0">
-                <a:solidFill>
-                  <a:srgbClr val="475569"/>
-                </a:solidFill>
-                <a:latin typeface="DM Sans"/>
-              </a:rPr>
-              <a:t>Bloques largos sáb/dom, semana ligera</a:t>
-            </a:r>
-          </a:p>
-        </p:txBody>
-      </p:sp>
-      <p:sp>
-        <p:nvSpPr>
-          <p:cNvPr id="25" name="TextBox 25"/>
-          <p:cNvSpPr txBox="1"/>
-          <p:nvPr/>
-        </p:nvSpPr>
-        <p:spPr>
-          <a:xfrm>
-            <a:off x="8336310" y="2816352"/>
-            <a:ext cx="3017520" cy="566928"/>
-          </a:xfrm>
-          <a:prstGeom prst="rect">
-            <a:avLst/>
-          </a:prstGeom>
-          <a:noFill/>
-        </p:spPr>
-        <p:txBody>
-          <a:bodyPr wrap="square" lIns="0" tIns="0" rIns="0" bIns="0" anchor="t">
-            <a:noAutofit/>
-          </a:bodyPr>
-          <a:lstStyle/>
-          <a:p>
-            <a:pPr algn="l">
-              <a:spcAft>
-                <a:spcPts val="200"/>
-              </a:spcAft>
-            </a:pPr>
-            <a:r>
-              <a:rPr lang="es-PE" sz="1350" b="1" i="0" u="none" dirty="0">
-                <a:solidFill>
-                  <a:srgbClr val="0F172A"/>
-                </a:solidFill>
-                <a:latin typeface="DM Sans"/>
-              </a:rPr>
-              <a:t>Tesis</a:t>
-            </a:r>
-            <a:r>
-              <a:rPr lang="es-PE" sz="1350" b="1" i="0" u="none" dirty="0">
-                <a:solidFill>
-                  <a:srgbClr val="16A34A"/>
-                </a:solidFill>
-                <a:latin typeface="DM Sans"/>
-              </a:rPr>
-              <a:t xml:space="preserve">  ·  16 h</a:t>
-            </a:r>
-          </a:p>
-          <a:p>
-            <a:pPr algn="l"/>
-            <a:r>
-              <a:rPr lang="es-PE" sz="1200" b="0" i="0" u="none" dirty="0">
-                <a:solidFill>
-                  <a:srgbClr val="334155"/>
-                </a:solidFill>
-                <a:latin typeface="DM Sans"/>
-              </a:rPr>
-              <a:t>Lun y Mar 2 h · Sáb y Dom 6 h (2×3 h)</a:t>
-            </a:r>
-          </a:p>
-        </p:txBody>
-      </p:sp>
-      <p:sp>
-        <p:nvSpPr>
-          <p:cNvPr id="26" name="TextBox 26"/>
-          <p:cNvSpPr txBox="1"/>
-          <p:nvPr/>
-        </p:nvSpPr>
-        <p:spPr>
-          <a:xfrm>
-            <a:off x="8336310" y="3401568"/>
-            <a:ext cx="3017520" cy="566928"/>
-          </a:xfrm>
-          <a:prstGeom prst="rect">
-            <a:avLst/>
-          </a:prstGeom>
-          <a:noFill/>
-        </p:spPr>
-        <p:txBody>
-          <a:bodyPr wrap="square" lIns="0" tIns="0" rIns="0" bIns="0" anchor="t">
-            <a:noAutofit/>
-          </a:bodyPr>
-          <a:lstStyle/>
-          <a:p>
-            <a:pPr algn="l">
-              <a:spcAft>
-                <a:spcPts val="200"/>
-              </a:spcAft>
-            </a:pPr>
-            <a:r>
-              <a:rPr lang="es-PE" sz="1350" b="1" i="0" u="none" dirty="0">
-                <a:solidFill>
-                  <a:srgbClr val="0F172A"/>
-                </a:solidFill>
-                <a:latin typeface="DM Sans"/>
-              </a:rPr>
-              <a:t>3D Graphics</a:t>
-            </a:r>
-            <a:r>
-              <a:rPr lang="es-PE" sz="1350" b="1" i="0" u="none" dirty="0">
-                <a:solidFill>
-                  <a:srgbClr val="16A34A"/>
-                </a:solidFill>
-                <a:latin typeface="DM Sans"/>
-              </a:rPr>
-              <a:t xml:space="preserve">  ·  10 h</a:t>
-            </a:r>
-          </a:p>
-          <a:p>
-            <a:pPr algn="l"/>
-            <a:r>
-              <a:rPr lang="es-PE" sz="1200" b="0" i="0" u="none" dirty="0">
-                <a:solidFill>
-                  <a:srgbClr val="334155"/>
-                </a:solidFill>
-                <a:latin typeface="DM Sans"/>
-              </a:rPr>
-              <a:t>Mié y Jue 2 h · Sáb y Dom 3 h</a:t>
-            </a:r>
-          </a:p>
-        </p:txBody>
-      </p:sp>
-      <p:sp>
-        <p:nvSpPr>
-          <p:cNvPr id="27" name="TextBox 27"/>
-          <p:cNvSpPr txBox="1"/>
-          <p:nvPr/>
-        </p:nvSpPr>
-        <p:spPr>
-          <a:xfrm>
-            <a:off x="8336310" y="3986784"/>
-            <a:ext cx="3017520" cy="566928"/>
-          </a:xfrm>
-          <a:prstGeom prst="rect">
-            <a:avLst/>
-          </a:prstGeom>
-          <a:noFill/>
-        </p:spPr>
-        <p:txBody>
-          <a:bodyPr wrap="square" lIns="0" tIns="0" rIns="0" bIns="0" anchor="t">
-            <a:noAutofit/>
-          </a:bodyPr>
-          <a:lstStyle/>
-          <a:p>
-            <a:pPr algn="l">
-              <a:spcAft>
-                <a:spcPts val="200"/>
-              </a:spcAft>
-            </a:pPr>
-            <a:r>
-              <a:rPr lang="es-PE" sz="1350" b="1" i="0" u="none" dirty="0">
-                <a:solidFill>
-                  <a:srgbClr val="0F172A"/>
-                </a:solidFill>
-                <a:latin typeface="DM Sans"/>
-              </a:rPr>
-              <a:t>Planificación IA</a:t>
-            </a:r>
-            <a:r>
-              <a:rPr lang="es-PE" sz="1350" b="1" i="0" u="none" dirty="0">
-                <a:solidFill>
-                  <a:srgbClr val="16A34A"/>
-                </a:solidFill>
-                <a:latin typeface="DM Sans"/>
-              </a:rPr>
-              <a:t xml:space="preserve">  ·  6 h</a:t>
-            </a:r>
-          </a:p>
-          <a:p>
-            <a:pPr algn="l"/>
-            <a:r>
-              <a:rPr lang="es-PE" sz="1200" b="0" i="0" u="none" dirty="0">
-                <a:solidFill>
-                  <a:srgbClr val="334155"/>
-                </a:solidFill>
-                <a:latin typeface="DM Sans"/>
-              </a:rPr>
-              <a:t>Lun y Mar 1 h · Sáb y Dom 2 h</a:t>
-            </a:r>
-          </a:p>
-        </p:txBody>
-      </p:sp>
-      <p:sp>
-        <p:nvSpPr>
-          <p:cNvPr id="28" name="Badge 28"/>
-          <p:cNvSpPr/>
-          <p:nvPr/>
-        </p:nvSpPr>
-        <p:spPr>
-          <a:xfrm>
-            <a:off x="8336310" y="5276088"/>
-            <a:ext cx="3017520" cy="329184"/>
-          </a:xfrm>
-          <a:prstGeom prst="roundRect">
-            <a:avLst>
-              <a:gd name="adj" fmla="val 50000"/>
-            </a:avLst>
-          </a:prstGeom>
-          <a:solidFill>
-            <a:srgbClr val="DCFCE7"/>
-          </a:solidFill>
-          <a:ln>
-            <a:noFill/>
-          </a:ln>
-          <a:effectLst/>
-        </p:spPr>
-        <p:txBody>
-          <a:bodyPr rtlCol="0" lIns="0" tIns="0" rIns="0" bIns="0" anchor="ctr">
-            <a:noAutofit/>
-          </a:bodyPr>
-          <a:lstStyle/>
-          <a:p>
-            <a:pPr algn="ctr"/>
-            <a:r>
-              <a:rPr lang="es-PE" sz="1150" b="1" i="0" u="none">
-                <a:solidFill>
-                  <a:srgbClr val="15803D"/>
-                </a:solidFill>
-                <a:latin typeface="DM Sans"/>
-              </a:rPr>
-              <a:t>32 h · Factible · Plan elegido</a:t>
+              <a:t>25 h · No factible: 2 bloques de 5 h</a:t>
             </a:r>
           </a:p>
         </p:txBody>
@@ -9065,7 +9421,7 @@
                 </a:solidFill>
                 <a:latin typeface="DM Sans"/>
               </a:rPr>
-              <a:t xml:space="preserve">Violaciones detectadas por la tool: </a:t>
+              <a:t xml:space="preserve">Violación de la tool: </a:t>
             </a:r>
             <a:r>
               <a:rPr lang="es-PE" sz="1200" b="0" i="0" u="none">
@@ -9074,7 +9430,7 @@
                 </a:solidFill>
                 <a:latin typeface="DM Sans"/>
               </a:rPr>
-              <a:t>el A tiene 2 sesiones de 6 h (máx. 3 h); el B, 2 sesiones de 4 h y Mié/Jue con 2.5 h donde hay 2 h libres. Pesos: factibilidad 35 % · prioridades 30 % · balance 20 % · sobrecarga 15 %.</a:t>
+              <a:t>C tiene 2 sesiones de 5 h (máx. 3 h). Los 3 planes usan los 7 días: ninguno dejó día de descanso. Pesos: factibilidad 35 % · prioridades 30 % · balance 20 % · sobrecarga 15 % (100 = sin riesgo).</a:t>
             </a:r>
           </a:p>
         </p:txBody>
@@ -9105,11 +9461,11 @@
             <a:r>
               <a:rPr lang="es-PE" sz="2800" b="1" i="0" u="none">
                 <a:solidFill>
-                  <a:srgbClr val="B91C1C"/>
+                  <a:srgbClr val="1D4ED8"/>
                 </a:solidFill>
                 <a:latin typeface="Space Grotesk"/>
               </a:rPr>
-              <a:t>69.1</a:t>
+              <a:t>76.3</a:t>
             </a:r>
           </a:p>
         </p:txBody>
@@ -9179,7 +9535,7 @@
                 </a:solidFill>
                 <a:latin typeface="DM Sans"/>
               </a:rPr>
-              <a:t>Fact. 50 · Prior. 100 · Bal. 78 · Sobr. 40</a:t>
+              <a:t>Fact. 100 · Prior. 98 · Bal. 40 · Sobr. 26</a:t>
             </a:r>
           </a:p>
         </p:txBody>
@@ -9210,11 +9566,11 @@
             <a:r>
               <a:rPr lang="es-PE" sz="2800" b="1" i="0" u="none">
                 <a:solidFill>
-                  <a:srgbClr val="B91C1C"/>
+                  <a:srgbClr val="15803D"/>
                 </a:solidFill>
                 <a:latin typeface="Space Grotesk"/>
               </a:rPr>
-              <a:t>39.2</a:t>
+              <a:t>85.1</a:t>
             </a:r>
           </a:p>
         </p:txBody>
@@ -9284,7 +9640,7 @@
                 </a:solidFill>
                 <a:latin typeface="DM Sans"/>
               </a:rPr>
-              <a:t>Fact. 0 · Prior. 100 · Bal. 46 · Sobr. 0</a:t>
+              <a:t>Fact. 100 · Prior. 81 · Bal. 54 · Sobr. 100</a:t>
             </a:r>
           </a:p>
         </p:txBody>
@@ -9315,11 +9671,11 @@
             <a:r>
               <a:rPr lang="es-PE" sz="2800" b="1" i="0" u="none">
                 <a:solidFill>
-                  <a:srgbClr val="15803D"/>
+                  <a:srgbClr val="B91C1C"/>
                 </a:solidFill>
                 <a:latin typeface="Space Grotesk"/>
               </a:rPr>
-              <a:t>87.5</a:t>
+              <a:t>80.7</a:t>
             </a:r>
           </a:p>
         </p:txBody>
@@ -9389,7 +9745,7 @@
                 </a:solidFill>
                 <a:latin typeface="DM Sans"/>
               </a:rPr>
-              <a:t>Fact. 100 · Prior. 100 · Bal. 76 · Sobr. 49</a:t>
+              <a:t>Fact. 50 · Prior. 100 · Bal. 91 · Sobr. 100</a:t>
             </a:r>
           </a:p>
         </p:txBody>
@@ -9424,7 +9780,7 @@
                 </a:solidFill>
                 <a:latin typeface="JetBrains Mono"/>
               </a:rPr>
-              <a:t>4 tools · 8 llamadas LLM · 22.0 s</a:t>
+              <a:t>4 tools · 6 llamadas LLM · 15.2 s</a:t>
             </a:r>
           </a:p>
         </p:txBody>
@@ -9670,7 +10026,7 @@
                 </a:solidFill>
                 <a:latin typeface="Space Grotesk"/>
               </a:rPr>
-              <a:t>Plan C Seleccionado: Bloques Fin de Semana</a:t>
+              <a:t>Plan B Seleccionado: Carga Pareja</a:t>
             </a:r>
           </a:p>
         </p:txBody>
@@ -9744,7 +10100,7 @@
                 </a:solidFill>
                 <a:latin typeface="DM Sans"/>
               </a:rPr>
-              <a:t>87.5</a:t>
+              <a:t>85.1</a:t>
             </a:r>
           </a:p>
         </p:txBody>
@@ -9779,7 +10135,7 @@
                 </a:solidFill>
                 <a:latin typeface="DM Sans"/>
               </a:rPr>
-              <a:t>100% Factible y Priorizado</a:t>
+              <a:t>Factible · riesgo mínimo</a:t>
             </a:r>
           </a:p>
         </p:txBody>
@@ -9814,7 +10170,7 @@
                 </a:solidFill>
                 <a:latin typeface="DM Sans"/>
               </a:rPr>
-              <a:t>32.0 horas semanales distribuidas en bloques de máx. 3h</a:t>
+              <a:t>20.5 horas semanales con margen libre cada día</a:t>
             </a:r>
           </a:p>
         </p:txBody>
@@ -9858,7 +10214,7 @@
                 </a:solidFill>
                 <a:latin typeface="DM Sans"/>
               </a:rPr>
-              <a:t> Único plan sin violaciones duras y que cubre las horas requeridas.</a:t>
+              <a:t xml:space="preserve"> Mayor puntaje ponderado (85.1), sin violaciones duras y con riesgo de sobrecarga mínimo.</a:t>
             </a:r>
           </a:p>
         </p:txBody>
@@ -9902,7 +10258,7 @@
                 </a:solidFill>
                 <a:latin typeface="DM Sans"/>
               </a:rPr>
-              <a:t> Fatiga por 11h de estudio en sábado y domingo; eventuales horas extra laborales.</a:t>
+              <a:t xml:space="preserve"> Cubre solo el 79 % de las horas de la Tesis (8.5 de 10.8 h); posible fatiga e imprevistos laborales.</a:t>
             </a:r>
           </a:p>
         </p:txBody>
@@ -9946,7 +10302,7 @@
                 </a:solidFill>
                 <a:latin typeface="DM Sans"/>
               </a:rPr>
-              <a:t> Confirmar disponibilidad real de 15h el sábado y no cruce con inglés.</a:t>
+              <a:t xml:space="preserve"> Confirmar horario laboral y de inglés; el plan usa los 7 días: definir el día de descanso.</a:t>
             </a:r>
           </a:p>
         </p:txBody>
@@ -9990,7 +10346,7 @@
                 </a:solidFill>
                 <a:latin typeface="DM Sans"/>
               </a:rPr>
-              <a:t> Mover 1–2h del fin de semana a lunes/martes y pausas cada 90 min.</a:t>
+              <a:t xml:space="preserve"> Sumar 1–2 h semanales a la Tesis y hacer pausas breves cada 2 h.</a:t>
             </a:r>
           </a:p>
         </p:txBody>

--- a/Planificador_de_Estudio_Multi-Agente.pptx
+++ b/Planificador_de_Estudio_Multi-Agente.pptx
@@ -5775,8 +5775,8 @@
         </p:nvSpPr>
         <p:spPr>
           <a:xfrm>
-            <a:off x="609600" y="1951291"/>
-            <a:ext cx="5295900" cy="3895344"/>
+            <a:off x="609600" y="1600200"/>
+            <a:ext cx="5295900" cy="4663440"/>
           </a:xfrm>
           <a:prstGeom prst="roundRect">
             <a:avLst>
@@ -5824,8 +5824,8 @@
         </p:nvSpPr>
         <p:spPr>
           <a:xfrm>
-            <a:off x="6286500" y="1947862"/>
-            <a:ext cx="5295900" cy="3895725"/>
+            <a:off x="6286500" y="1600200"/>
+            <a:ext cx="5295900" cy="4663440"/>
           </a:xfrm>
           <a:prstGeom prst="roundRect">
             <a:avLst>
@@ -5873,7 +5873,7 @@
         </p:nvSpPr>
         <p:spPr>
           <a:xfrm>
-            <a:off x="923925" y="3360991"/>
+            <a:off x="923925" y="3017520"/>
             <a:ext cx="4667250" cy="495300"/>
           </a:xfrm>
           <a:prstGeom prst="roundRect">
@@ -5928,7 +5928,7 @@
         </p:blipFill>
         <p:spPr>
           <a:xfrm>
-            <a:off x="923925" y="2294191"/>
+            <a:off x="923925" y="1947672"/>
             <a:ext cx="171450" cy="228600"/>
           </a:xfrm>
           <a:prstGeom prst="rect">
@@ -5952,7 +5952,7 @@
         </p:blipFill>
         <p:spPr>
           <a:xfrm>
-            <a:off x="6600825" y="2290762"/>
+            <a:off x="6600825" y="1947672"/>
             <a:ext cx="200025" cy="228600"/>
           </a:xfrm>
           <a:prstGeom prst="rect">
@@ -6003,7 +6003,7 @@
         </p:nvSpPr>
         <p:spPr>
           <a:xfrm>
-            <a:off x="738187" y="1123950"/>
+            <a:off x="609905" y="813816"/>
             <a:ext cx="7700826" cy="415498"/>
           </a:xfrm>
           <a:prstGeom prst="rect">
@@ -6019,67 +6019,13 @@
           <a:p>
             <a:pPr algn="l"/>
             <a:r>
-              <a:rPr sz="2700" b="1" i="0" u="none" dirty="0" err="1">
+              <a:rPr sz="2700" b="1" i="0" u="none">
                 <a:solidFill>
                   <a:srgbClr val="0F172A"/>
                 </a:solidFill>
                 <a:latin typeface="Space Grotesk"/>
               </a:rPr>
-              <a:t>Fórmulas</a:t>
-            </a:r>
-            <a:r>
-              <a:rPr sz="2700" b="1" i="0" u="none" dirty="0">
-                <a:solidFill>
-                  <a:srgbClr val="0F172A"/>
-                </a:solidFill>
-                <a:latin typeface="Space Grotesk"/>
-              </a:rPr>
-              <a:t> </a:t>
-            </a:r>
-            <a:r>
-              <a:rPr sz="2700" b="1" i="0" u="none" dirty="0" err="1">
-                <a:solidFill>
-                  <a:srgbClr val="0F172A"/>
-                </a:solidFill>
-                <a:latin typeface="Space Grotesk"/>
-              </a:rPr>
-              <a:t>Deterministas</a:t>
-            </a:r>
-            <a:r>
-              <a:rPr sz="2700" b="1" i="0" u="none" dirty="0">
-                <a:solidFill>
-                  <a:srgbClr val="0F172A"/>
-                </a:solidFill>
-                <a:latin typeface="Space Grotesk"/>
-              </a:rPr>
-              <a:t> y </a:t>
-            </a:r>
-            <a:r>
-              <a:rPr lang="es-ES" sz="2700" b="1" i="0" u="none" dirty="0" err="1" smtClean="0">
-                <a:solidFill>
-                  <a:srgbClr val="0F172A"/>
-                </a:solidFill>
-                <a:latin typeface="Space Grotesk"/>
-              </a:rPr>
-              <a:t>Gestion</a:t>
-            </a:r>
-            <a:r>
-              <a:rPr sz="2700" b="1" i="0" u="none" dirty="0" smtClean="0">
-                <a:solidFill>
-                  <a:srgbClr val="0F172A"/>
-                </a:solidFill>
-                <a:latin typeface="Space Grotesk"/>
-              </a:rPr>
-              <a:t> </a:t>
-            </a:r>
-            <a:r>
-              <a:rPr sz="2700" b="1" i="0" u="none" dirty="0">
-                <a:solidFill>
-                  <a:srgbClr val="0F172A"/>
-                </a:solidFill>
-                <a:latin typeface="Space Grotesk"/>
-              </a:rPr>
-              <a:t>de API Keys</a:t>
+              <a:t>Fórmulas Deterministas y Gestión de API Keys</a:t>
             </a:r>
           </a:p>
         </p:txBody>
@@ -6092,7 +6038,7 @@
         </p:nvSpPr>
         <p:spPr>
           <a:xfrm>
-            <a:off x="923925" y="2265616"/>
+            <a:off x="923925" y="1920240"/>
             <a:ext cx="6125765" cy="295275"/>
           </a:xfrm>
           <a:prstGeom prst="rect">
@@ -6127,7 +6073,7 @@
         </p:nvSpPr>
         <p:spPr>
           <a:xfrm>
-            <a:off x="923925" y="2732341"/>
+            <a:off x="923925" y="2386584"/>
             <a:ext cx="4762500" cy="457200"/>
           </a:xfrm>
           <a:prstGeom prst="rect">
@@ -6162,7 +6108,7 @@
         </p:nvSpPr>
         <p:spPr>
           <a:xfrm>
-            <a:off x="6600825" y="2262187"/>
+            <a:off x="6600825" y="1911096"/>
             <a:ext cx="5591175" cy="295275"/>
           </a:xfrm>
           <a:prstGeom prst="rect">
@@ -6197,7 +6143,7 @@
         </p:nvSpPr>
         <p:spPr>
           <a:xfrm>
-            <a:off x="6600825" y="2728912"/>
+            <a:off x="6600825" y="2377440"/>
             <a:ext cx="4762500" cy="457200"/>
           </a:xfrm>
           <a:prstGeom prst="rect">
@@ -6232,7 +6178,7 @@
         </p:nvSpPr>
         <p:spPr>
           <a:xfrm>
-            <a:off x="1076325" y="3513391"/>
+            <a:off x="1076325" y="3163824"/>
             <a:ext cx="5453062" cy="190500"/>
           </a:xfrm>
           <a:prstGeom prst="rect">
@@ -6267,7 +6213,7 @@
         </p:nvSpPr>
         <p:spPr>
           <a:xfrm>
-            <a:off x="923925" y="4818888"/>
+            <a:off x="923925" y="5303520"/>
             <a:ext cx="5834062" cy="228600"/>
           </a:xfrm>
           <a:prstGeom prst="rect">
@@ -6311,7 +6257,7 @@
         </p:nvSpPr>
         <p:spPr>
           <a:xfrm>
-            <a:off x="923925" y="5120640"/>
+            <a:off x="923925" y="5577840"/>
             <a:ext cx="5834062" cy="228600"/>
           </a:xfrm>
           <a:prstGeom prst="rect">
@@ -6355,7 +6301,7 @@
         </p:nvSpPr>
         <p:spPr>
           <a:xfrm>
-            <a:off x="923925" y="5422392"/>
+            <a:off x="923925" y="5852160"/>
             <a:ext cx="5834062" cy="228600"/>
           </a:xfrm>
           <a:prstGeom prst="rect">
@@ -6399,7 +6345,7 @@
         </p:nvSpPr>
         <p:spPr>
           <a:xfrm>
-            <a:off x="6600825" y="3357562"/>
+            <a:off x="6600825" y="3063240"/>
             <a:ext cx="4762500" cy="457200"/>
           </a:xfrm>
           <a:prstGeom prst="rect">
@@ -6443,7 +6389,7 @@
         </p:nvSpPr>
         <p:spPr>
           <a:xfrm>
-            <a:off x="6600825" y="3929062"/>
+            <a:off x="6600825" y="4023360"/>
             <a:ext cx="4762500" cy="457200"/>
           </a:xfrm>
           <a:prstGeom prst="rect">
@@ -6487,7 +6433,7 @@
         </p:nvSpPr>
         <p:spPr>
           <a:xfrm>
-            <a:off x="6600825" y="4500562"/>
+            <a:off x="6600825" y="4681728"/>
             <a:ext cx="4762500" cy="457200"/>
           </a:xfrm>
           <a:prstGeom prst="rect">
@@ -6531,7 +6477,7 @@
         </p:nvSpPr>
         <p:spPr>
           <a:xfrm>
-            <a:off x="6600825" y="5072062"/>
+            <a:off x="6600825" y="5340096"/>
             <a:ext cx="4762500" cy="457200"/>
           </a:xfrm>
           <a:prstGeom prst="rect">
@@ -6575,8 +6521,8 @@
         </p:nvSpPr>
         <p:spPr>
           <a:xfrm>
-            <a:off x="923544" y="3931920"/>
-            <a:ext cx="4663440" cy="566928"/>
+            <a:off x="923544" y="3593592"/>
+            <a:ext cx="4663440" cy="365760"/>
           </a:xfrm>
           <a:prstGeom prst="rect">
             <a:avLst/>
@@ -6636,45 +6582,6 @@
                 </a:solidFill>
                 <a:latin typeface="DM Sans"/>
               </a:rPr>
-              <a:t>F_dif</a:t>
-            </a:r>
-            <a:r>
-              <a:rPr sz="1100" b="0" i="0" u="none">
-                <a:solidFill>
-                  <a:srgbClr val="64748B"/>
-                </a:solidFill>
-                <a:latin typeface="DM Sans"/>
-              </a:rPr>
-              <a:t xml:space="preserve"> = dificultad (0.8–1.5) · </a:t>
-            </a:r>
-            <a:r>
-              <a:rPr sz="1100" b="1" i="0" u="none">
-                <a:solidFill>
-                  <a:srgbClr val="334155"/>
-                </a:solidFill>
-                <a:latin typeface="DM Sans"/>
-              </a:rPr>
-              <a:t>F_urg</a:t>
-            </a:r>
-            <a:r>
-              <a:rPr sz="1100" b="0" i="0" u="none">
-                <a:solidFill>
-                  <a:srgbClr val="64748B"/>
-                </a:solidFill>
-                <a:latin typeface="DM Sans"/>
-              </a:rPr>
-              <a:t xml:space="preserve"> = urgencia (1–1.5)</a:t>
-            </a:r>
-          </a:p>
-          <a:p>
-            <a:pPr algn="l"/>
-            <a:r>
-              <a:rPr sz="1100" b="1" i="0" u="none">
-                <a:solidFill>
-                  <a:srgbClr val="334155"/>
-                </a:solidFill>
-                <a:latin typeface="DM Sans"/>
-              </a:rPr>
               <a:t>F_pri</a:t>
             </a:r>
             <a:r>
@@ -6697,7 +6604,7 @@
         </p:nvSpPr>
         <p:spPr>
           <a:xfrm>
-            <a:off x="923544" y="4553712"/>
+            <a:off x="923544" y="5047488"/>
             <a:ext cx="4663440" cy="201168"/>
           </a:xfrm>
           <a:prstGeom prst="rect">
@@ -6724,6 +6631,1330 @@
           </a:p>
         </p:txBody>
       </p:sp>
+      <p:graphicFrame>
+        <p:nvGraphicFramePr>
+          <p:cNvPr id="23" name="Tabla factores" descr="Tablas de los factores: dificultad (1 a 5) a F_dif y días a la evaluación a F_urg"/>
+          <p:cNvGraphicFramePr>
+            <a:graphicFrameLocks noGrp="1"/>
+          </p:cNvGraphicFramePr>
+          <p:nvPr/>
+        </p:nvGraphicFramePr>
+        <p:xfrm>
+          <a:off x="923544" y="4005072"/>
+          <a:ext cx="4663440" cy="960120"/>
+        </p:xfrm>
+        <a:graphic>
+          <a:graphicData uri="http://schemas.openxmlformats.org/drawingml/2006/table">
+            <a:tbl>
+              <a:tblPr/>
+              <a:tblGrid>
+                <a:gridCol w="1463040"/>
+                <a:gridCol w="640080"/>
+                <a:gridCol w="640080"/>
+                <a:gridCol w="640080"/>
+                <a:gridCol w="640080"/>
+                <a:gridCol w="640080"/>
+              </a:tblGrid>
+              <a:tr h="192024">
+                <a:tc gridSpan="6">
+                  <a:txBody>
+                    <a:bodyPr/>
+                    <a:lstStyle/>
+                    <a:p>
+                      <a:pPr algn="l"/>
+                      <a:r>
+                        <a:rPr lang="es-PE" sz="1000" b="0" i="1">
+                          <a:solidFill>
+                            <a:srgbClr val="64748B"/>
+                          </a:solidFill>
+                          <a:latin typeface="DM Sans"/>
+                        </a:rPr>
+                        <a:t>Factores fijos (supuestos ajustables); el usuario solo da dificultad y días</a:t>
+                      </a:r>
+                    </a:p>
+                  </a:txBody>
+                  <a:tcPr marL="45720" marR="45720" marT="18288" marB="18288" anchor="ctr">
+                    <a:lnL w="0">
+                      <a:noFill/>
+                    </a:lnL>
+                    <a:lnR w="0">
+                      <a:noFill/>
+                    </a:lnR>
+                    <a:lnT w="0">
+                      <a:noFill/>
+                    </a:lnT>
+                    <a:lnB w="0">
+                      <a:noFill/>
+                    </a:lnB>
+                    <a:noFill/>
+                  </a:tcPr>
+                </a:tc>
+                <a:tc hMerge="1">
+                  <a:txBody>
+                    <a:bodyPr/>
+                    <a:lstStyle/>
+                    <a:p>
+                      <a:pPr algn="ctr"/>
+                      <a:endParaRPr lang="es-PE"/>
+                    </a:p>
+                  </a:txBody>
+                  <a:tcPr marL="45720" marR="45720" marT="18288" marB="18288" anchor="ctr">
+                    <a:lnL w="0">
+                      <a:noFill/>
+                    </a:lnL>
+                    <a:lnR w="0">
+                      <a:noFill/>
+                    </a:lnR>
+                    <a:lnT w="0">
+                      <a:noFill/>
+                    </a:lnT>
+                    <a:lnB w="0">
+                      <a:noFill/>
+                    </a:lnB>
+                    <a:noFill/>
+                  </a:tcPr>
+                </a:tc>
+                <a:tc hMerge="1">
+                  <a:txBody>
+                    <a:bodyPr/>
+                    <a:lstStyle/>
+                    <a:p>
+                      <a:pPr algn="ctr"/>
+                      <a:endParaRPr lang="es-PE"/>
+                    </a:p>
+                  </a:txBody>
+                  <a:tcPr marL="45720" marR="45720" marT="18288" marB="18288" anchor="ctr">
+                    <a:lnL w="0">
+                      <a:noFill/>
+                    </a:lnL>
+                    <a:lnR w="0">
+                      <a:noFill/>
+                    </a:lnR>
+                    <a:lnT w="0">
+                      <a:noFill/>
+                    </a:lnT>
+                    <a:lnB w="0">
+                      <a:noFill/>
+                    </a:lnB>
+                    <a:noFill/>
+                  </a:tcPr>
+                </a:tc>
+                <a:tc hMerge="1">
+                  <a:txBody>
+                    <a:bodyPr/>
+                    <a:lstStyle/>
+                    <a:p>
+                      <a:pPr algn="ctr"/>
+                      <a:endParaRPr lang="es-PE"/>
+                    </a:p>
+                  </a:txBody>
+                  <a:tcPr marL="45720" marR="45720" marT="18288" marB="18288" anchor="ctr">
+                    <a:lnL w="0">
+                      <a:noFill/>
+                    </a:lnL>
+                    <a:lnR w="0">
+                      <a:noFill/>
+                    </a:lnR>
+                    <a:lnT w="0">
+                      <a:noFill/>
+                    </a:lnT>
+                    <a:lnB w="0">
+                      <a:noFill/>
+                    </a:lnB>
+                    <a:noFill/>
+                  </a:tcPr>
+                </a:tc>
+                <a:tc hMerge="1">
+                  <a:txBody>
+                    <a:bodyPr/>
+                    <a:lstStyle/>
+                    <a:p>
+                      <a:pPr algn="ctr"/>
+                      <a:endParaRPr lang="es-PE"/>
+                    </a:p>
+                  </a:txBody>
+                  <a:tcPr marL="45720" marR="45720" marT="18288" marB="18288" anchor="ctr">
+                    <a:lnL w="0">
+                      <a:noFill/>
+                    </a:lnL>
+                    <a:lnR w="0">
+                      <a:noFill/>
+                    </a:lnR>
+                    <a:lnT w="0">
+                      <a:noFill/>
+                    </a:lnT>
+                    <a:lnB w="0">
+                      <a:noFill/>
+                    </a:lnB>
+                    <a:noFill/>
+                  </a:tcPr>
+                </a:tc>
+                <a:tc hMerge="1">
+                  <a:txBody>
+                    <a:bodyPr/>
+                    <a:lstStyle/>
+                    <a:p>
+                      <a:pPr algn="ctr"/>
+                      <a:endParaRPr lang="es-PE"/>
+                    </a:p>
+                  </a:txBody>
+                  <a:tcPr marL="45720" marR="45720" marT="18288" marB="18288" anchor="ctr">
+                    <a:lnL w="0">
+                      <a:noFill/>
+                    </a:lnL>
+                    <a:lnR w="0">
+                      <a:noFill/>
+                    </a:lnR>
+                    <a:lnT w="0">
+                      <a:noFill/>
+                    </a:lnT>
+                    <a:lnB w="0">
+                      <a:noFill/>
+                    </a:lnB>
+                    <a:noFill/>
+                  </a:tcPr>
+                </a:tc>
+              </a:tr>
+              <a:tr h="192024">
+                <a:tc>
+                  <a:txBody>
+                    <a:bodyPr/>
+                    <a:lstStyle/>
+                    <a:p>
+                      <a:pPr algn="l"/>
+                      <a:r>
+                        <a:rPr lang="es-PE" sz="1000" b="1" i="0">
+                          <a:solidFill>
+                            <a:srgbClr val="475569"/>
+                          </a:solidFill>
+                          <a:latin typeface="DM Sans"/>
+                        </a:rPr>
+                        <a:t>Dificultad</a:t>
+                      </a:r>
+                    </a:p>
+                  </a:txBody>
+                  <a:tcPr marL="45720" marR="45720" marT="18288" marB="18288" anchor="ctr">
+                    <a:lnL w="6350" cap="flat" cmpd="sng" algn="ctr">
+                      <a:solidFill>
+                        <a:srgbClr val="E2E8F0"/>
+                      </a:solidFill>
+                      <a:prstDash val="solid"/>
+                    </a:lnL>
+                    <a:lnR w="6350" cap="flat" cmpd="sng" algn="ctr">
+                      <a:solidFill>
+                        <a:srgbClr val="E2E8F0"/>
+                      </a:solidFill>
+                      <a:prstDash val="solid"/>
+                    </a:lnR>
+                    <a:lnT w="6350" cap="flat" cmpd="sng" algn="ctr">
+                      <a:solidFill>
+                        <a:srgbClr val="E2E8F0"/>
+                      </a:solidFill>
+                      <a:prstDash val="solid"/>
+                    </a:lnT>
+                    <a:lnB w="6350" cap="flat" cmpd="sng" algn="ctr">
+                      <a:solidFill>
+                        <a:srgbClr val="E2E8F0"/>
+                      </a:solidFill>
+                      <a:prstDash val="solid"/>
+                    </a:lnB>
+                    <a:solidFill>
+                      <a:srgbClr val="F1F5F9"/>
+                    </a:solidFill>
+                  </a:tcPr>
+                </a:tc>
+                <a:tc>
+                  <a:txBody>
+                    <a:bodyPr/>
+                    <a:lstStyle/>
+                    <a:p>
+                      <a:pPr algn="ctr"/>
+                      <a:r>
+                        <a:rPr lang="es-PE" sz="1000" b="0" i="0">
+                          <a:solidFill>
+                            <a:srgbClr val="475569"/>
+                          </a:solidFill>
+                          <a:latin typeface="DM Sans"/>
+                        </a:rPr>
+                        <a:t>1</a:t>
+                      </a:r>
+                    </a:p>
+                  </a:txBody>
+                  <a:tcPr marL="45720" marR="45720" marT="18288" marB="18288" anchor="ctr">
+                    <a:lnL w="6350" cap="flat" cmpd="sng" algn="ctr">
+                      <a:solidFill>
+                        <a:srgbClr val="E2E8F0"/>
+                      </a:solidFill>
+                      <a:prstDash val="solid"/>
+                    </a:lnL>
+                    <a:lnR w="6350" cap="flat" cmpd="sng" algn="ctr">
+                      <a:solidFill>
+                        <a:srgbClr val="E2E8F0"/>
+                      </a:solidFill>
+                      <a:prstDash val="solid"/>
+                    </a:lnR>
+                    <a:lnT w="6350" cap="flat" cmpd="sng" algn="ctr">
+                      <a:solidFill>
+                        <a:srgbClr val="E2E8F0"/>
+                      </a:solidFill>
+                      <a:prstDash val="solid"/>
+                    </a:lnT>
+                    <a:lnB w="6350" cap="flat" cmpd="sng" algn="ctr">
+                      <a:solidFill>
+                        <a:srgbClr val="E2E8F0"/>
+                      </a:solidFill>
+                      <a:prstDash val="solid"/>
+                    </a:lnB>
+                    <a:solidFill>
+                      <a:srgbClr val="F1F5F9"/>
+                    </a:solidFill>
+                  </a:tcPr>
+                </a:tc>
+                <a:tc>
+                  <a:txBody>
+                    <a:bodyPr/>
+                    <a:lstStyle/>
+                    <a:p>
+                      <a:pPr algn="ctr"/>
+                      <a:r>
+                        <a:rPr lang="es-PE" sz="1000" b="0" i="0">
+                          <a:solidFill>
+                            <a:srgbClr val="475569"/>
+                          </a:solidFill>
+                          <a:latin typeface="DM Sans"/>
+                        </a:rPr>
+                        <a:t>2</a:t>
+                      </a:r>
+                    </a:p>
+                  </a:txBody>
+                  <a:tcPr marL="45720" marR="45720" marT="18288" marB="18288" anchor="ctr">
+                    <a:lnL w="6350" cap="flat" cmpd="sng" algn="ctr">
+                      <a:solidFill>
+                        <a:srgbClr val="E2E8F0"/>
+                      </a:solidFill>
+                      <a:prstDash val="solid"/>
+                    </a:lnL>
+                    <a:lnR w="6350" cap="flat" cmpd="sng" algn="ctr">
+                      <a:solidFill>
+                        <a:srgbClr val="E2E8F0"/>
+                      </a:solidFill>
+                      <a:prstDash val="solid"/>
+                    </a:lnR>
+                    <a:lnT w="6350" cap="flat" cmpd="sng" algn="ctr">
+                      <a:solidFill>
+                        <a:srgbClr val="E2E8F0"/>
+                      </a:solidFill>
+                      <a:prstDash val="solid"/>
+                    </a:lnT>
+                    <a:lnB w="6350" cap="flat" cmpd="sng" algn="ctr">
+                      <a:solidFill>
+                        <a:srgbClr val="E2E8F0"/>
+                      </a:solidFill>
+                      <a:prstDash val="solid"/>
+                    </a:lnB>
+                    <a:solidFill>
+                      <a:srgbClr val="F1F5F9"/>
+                    </a:solidFill>
+                  </a:tcPr>
+                </a:tc>
+                <a:tc>
+                  <a:txBody>
+                    <a:bodyPr/>
+                    <a:lstStyle/>
+                    <a:p>
+                      <a:pPr algn="ctr"/>
+                      <a:r>
+                        <a:rPr lang="es-PE" sz="1000" b="0" i="0">
+                          <a:solidFill>
+                            <a:srgbClr val="475569"/>
+                          </a:solidFill>
+                          <a:latin typeface="DM Sans"/>
+                        </a:rPr>
+                        <a:t>3</a:t>
+                      </a:r>
+                    </a:p>
+                  </a:txBody>
+                  <a:tcPr marL="45720" marR="45720" marT="18288" marB="18288" anchor="ctr">
+                    <a:lnL w="6350" cap="flat" cmpd="sng" algn="ctr">
+                      <a:solidFill>
+                        <a:srgbClr val="E2E8F0"/>
+                      </a:solidFill>
+                      <a:prstDash val="solid"/>
+                    </a:lnL>
+                    <a:lnR w="6350" cap="flat" cmpd="sng" algn="ctr">
+                      <a:solidFill>
+                        <a:srgbClr val="E2E8F0"/>
+                      </a:solidFill>
+                      <a:prstDash val="solid"/>
+                    </a:lnR>
+                    <a:lnT w="6350" cap="flat" cmpd="sng" algn="ctr">
+                      <a:solidFill>
+                        <a:srgbClr val="E2E8F0"/>
+                      </a:solidFill>
+                      <a:prstDash val="solid"/>
+                    </a:lnT>
+                    <a:lnB w="6350" cap="flat" cmpd="sng" algn="ctr">
+                      <a:solidFill>
+                        <a:srgbClr val="E2E8F0"/>
+                      </a:solidFill>
+                      <a:prstDash val="solid"/>
+                    </a:lnB>
+                    <a:solidFill>
+                      <a:srgbClr val="F1F5F9"/>
+                    </a:solidFill>
+                  </a:tcPr>
+                </a:tc>
+                <a:tc>
+                  <a:txBody>
+                    <a:bodyPr/>
+                    <a:lstStyle/>
+                    <a:p>
+                      <a:pPr algn="ctr"/>
+                      <a:r>
+                        <a:rPr lang="es-PE" sz="1000" b="0" i="0">
+                          <a:solidFill>
+                            <a:srgbClr val="475569"/>
+                          </a:solidFill>
+                          <a:latin typeface="DM Sans"/>
+                        </a:rPr>
+                        <a:t>4</a:t>
+                      </a:r>
+                    </a:p>
+                  </a:txBody>
+                  <a:tcPr marL="45720" marR="45720" marT="18288" marB="18288" anchor="ctr">
+                    <a:lnL w="6350" cap="flat" cmpd="sng" algn="ctr">
+                      <a:solidFill>
+                        <a:srgbClr val="E2E8F0"/>
+                      </a:solidFill>
+                      <a:prstDash val="solid"/>
+                    </a:lnL>
+                    <a:lnR w="6350" cap="flat" cmpd="sng" algn="ctr">
+                      <a:solidFill>
+                        <a:srgbClr val="E2E8F0"/>
+                      </a:solidFill>
+                      <a:prstDash val="solid"/>
+                    </a:lnR>
+                    <a:lnT w="6350" cap="flat" cmpd="sng" algn="ctr">
+                      <a:solidFill>
+                        <a:srgbClr val="E2E8F0"/>
+                      </a:solidFill>
+                      <a:prstDash val="solid"/>
+                    </a:lnT>
+                    <a:lnB w="6350" cap="flat" cmpd="sng" algn="ctr">
+                      <a:solidFill>
+                        <a:srgbClr val="E2E8F0"/>
+                      </a:solidFill>
+                      <a:prstDash val="solid"/>
+                    </a:lnB>
+                    <a:solidFill>
+                      <a:srgbClr val="F1F5F9"/>
+                    </a:solidFill>
+                  </a:tcPr>
+                </a:tc>
+                <a:tc>
+                  <a:txBody>
+                    <a:bodyPr/>
+                    <a:lstStyle/>
+                    <a:p>
+                      <a:pPr algn="ctr"/>
+                      <a:r>
+                        <a:rPr lang="es-PE" sz="1000" b="0" i="0">
+                          <a:solidFill>
+                            <a:srgbClr val="475569"/>
+                          </a:solidFill>
+                          <a:latin typeface="DM Sans"/>
+                        </a:rPr>
+                        <a:t>5</a:t>
+                      </a:r>
+                    </a:p>
+                  </a:txBody>
+                  <a:tcPr marL="45720" marR="45720" marT="18288" marB="18288" anchor="ctr">
+                    <a:lnL w="6350" cap="flat" cmpd="sng" algn="ctr">
+                      <a:solidFill>
+                        <a:srgbClr val="E2E8F0"/>
+                      </a:solidFill>
+                      <a:prstDash val="solid"/>
+                    </a:lnL>
+                    <a:lnR w="6350" cap="flat" cmpd="sng" algn="ctr">
+                      <a:solidFill>
+                        <a:srgbClr val="E2E8F0"/>
+                      </a:solidFill>
+                      <a:prstDash val="solid"/>
+                    </a:lnR>
+                    <a:lnT w="6350" cap="flat" cmpd="sng" algn="ctr">
+                      <a:solidFill>
+                        <a:srgbClr val="E2E8F0"/>
+                      </a:solidFill>
+                      <a:prstDash val="solid"/>
+                    </a:lnT>
+                    <a:lnB w="6350" cap="flat" cmpd="sng" algn="ctr">
+                      <a:solidFill>
+                        <a:srgbClr val="E2E8F0"/>
+                      </a:solidFill>
+                      <a:prstDash val="solid"/>
+                    </a:lnB>
+                    <a:solidFill>
+                      <a:srgbClr val="F1F5F9"/>
+                    </a:solidFill>
+                  </a:tcPr>
+                </a:tc>
+              </a:tr>
+              <a:tr h="192024">
+                <a:tc>
+                  <a:txBody>
+                    <a:bodyPr/>
+                    <a:lstStyle/>
+                    <a:p>
+                      <a:pPr algn="l"/>
+                      <a:r>
+                        <a:rPr lang="es-PE" sz="1000" b="1" i="0">
+                          <a:solidFill>
+                            <a:srgbClr val="0F172A"/>
+                          </a:solidFill>
+                          <a:latin typeface="DM Sans"/>
+                        </a:rPr>
+                        <a:t>→ F_dif</a:t>
+                      </a:r>
+                    </a:p>
+                  </a:txBody>
+                  <a:tcPr marL="45720" marR="45720" marT="18288" marB="18288" anchor="ctr">
+                    <a:lnL w="6350" cap="flat" cmpd="sng" algn="ctr">
+                      <a:solidFill>
+                        <a:srgbClr val="E2E8F0"/>
+                      </a:solidFill>
+                      <a:prstDash val="solid"/>
+                    </a:lnL>
+                    <a:lnR w="6350" cap="flat" cmpd="sng" algn="ctr">
+                      <a:solidFill>
+                        <a:srgbClr val="E2E8F0"/>
+                      </a:solidFill>
+                      <a:prstDash val="solid"/>
+                    </a:lnR>
+                    <a:lnT w="6350" cap="flat" cmpd="sng" algn="ctr">
+                      <a:solidFill>
+                        <a:srgbClr val="E2E8F0"/>
+                      </a:solidFill>
+                      <a:prstDash val="solid"/>
+                    </a:lnT>
+                    <a:lnB w="6350" cap="flat" cmpd="sng" algn="ctr">
+                      <a:solidFill>
+                        <a:srgbClr val="E2E8F0"/>
+                      </a:solidFill>
+                      <a:prstDash val="solid"/>
+                    </a:lnB>
+                    <a:solidFill>
+                      <a:srgbClr val="FFFFFF"/>
+                    </a:solidFill>
+                  </a:tcPr>
+                </a:tc>
+                <a:tc>
+                  <a:txBody>
+                    <a:bodyPr/>
+                    <a:lstStyle/>
+                    <a:p>
+                      <a:pPr algn="ctr"/>
+                      <a:r>
+                        <a:rPr lang="es-PE" sz="1000" b="1" i="0">
+                          <a:solidFill>
+                            <a:srgbClr val="0F172A"/>
+                          </a:solidFill>
+                          <a:latin typeface="DM Sans"/>
+                        </a:rPr>
+                        <a:t>0.8</a:t>
+                      </a:r>
+                    </a:p>
+                  </a:txBody>
+                  <a:tcPr marL="45720" marR="45720" marT="18288" marB="18288" anchor="ctr">
+                    <a:lnL w="6350" cap="flat" cmpd="sng" algn="ctr">
+                      <a:solidFill>
+                        <a:srgbClr val="E2E8F0"/>
+                      </a:solidFill>
+                      <a:prstDash val="solid"/>
+                    </a:lnL>
+                    <a:lnR w="6350" cap="flat" cmpd="sng" algn="ctr">
+                      <a:solidFill>
+                        <a:srgbClr val="E2E8F0"/>
+                      </a:solidFill>
+                      <a:prstDash val="solid"/>
+                    </a:lnR>
+                    <a:lnT w="6350" cap="flat" cmpd="sng" algn="ctr">
+                      <a:solidFill>
+                        <a:srgbClr val="E2E8F0"/>
+                      </a:solidFill>
+                      <a:prstDash val="solid"/>
+                    </a:lnT>
+                    <a:lnB w="6350" cap="flat" cmpd="sng" algn="ctr">
+                      <a:solidFill>
+                        <a:srgbClr val="E2E8F0"/>
+                      </a:solidFill>
+                      <a:prstDash val="solid"/>
+                    </a:lnB>
+                    <a:solidFill>
+                      <a:srgbClr val="FFFFFF"/>
+                    </a:solidFill>
+                  </a:tcPr>
+                </a:tc>
+                <a:tc>
+                  <a:txBody>
+                    <a:bodyPr/>
+                    <a:lstStyle/>
+                    <a:p>
+                      <a:pPr algn="ctr"/>
+                      <a:r>
+                        <a:rPr lang="es-PE" sz="1000" b="1" i="0">
+                          <a:solidFill>
+                            <a:srgbClr val="0F172A"/>
+                          </a:solidFill>
+                          <a:latin typeface="DM Sans"/>
+                        </a:rPr>
+                        <a:t>0.9</a:t>
+                      </a:r>
+                    </a:p>
+                  </a:txBody>
+                  <a:tcPr marL="45720" marR="45720" marT="18288" marB="18288" anchor="ctr">
+                    <a:lnL w="6350" cap="flat" cmpd="sng" algn="ctr">
+                      <a:solidFill>
+                        <a:srgbClr val="E2E8F0"/>
+                      </a:solidFill>
+                      <a:prstDash val="solid"/>
+                    </a:lnL>
+                    <a:lnR w="6350" cap="flat" cmpd="sng" algn="ctr">
+                      <a:solidFill>
+                        <a:srgbClr val="E2E8F0"/>
+                      </a:solidFill>
+                      <a:prstDash val="solid"/>
+                    </a:lnR>
+                    <a:lnT w="6350" cap="flat" cmpd="sng" algn="ctr">
+                      <a:solidFill>
+                        <a:srgbClr val="E2E8F0"/>
+                      </a:solidFill>
+                      <a:prstDash val="solid"/>
+                    </a:lnT>
+                    <a:lnB w="6350" cap="flat" cmpd="sng" algn="ctr">
+                      <a:solidFill>
+                        <a:srgbClr val="E2E8F0"/>
+                      </a:solidFill>
+                      <a:prstDash val="solid"/>
+                    </a:lnB>
+                    <a:solidFill>
+                      <a:srgbClr val="FFFFFF"/>
+                    </a:solidFill>
+                  </a:tcPr>
+                </a:tc>
+                <a:tc>
+                  <a:txBody>
+                    <a:bodyPr/>
+                    <a:lstStyle/>
+                    <a:p>
+                      <a:pPr algn="ctr"/>
+                      <a:r>
+                        <a:rPr lang="es-PE" sz="1000" b="1" i="0">
+                          <a:solidFill>
+                            <a:srgbClr val="0F172A"/>
+                          </a:solidFill>
+                          <a:latin typeface="DM Sans"/>
+                        </a:rPr>
+                        <a:t>1.0</a:t>
+                      </a:r>
+                    </a:p>
+                  </a:txBody>
+                  <a:tcPr marL="45720" marR="45720" marT="18288" marB="18288" anchor="ctr">
+                    <a:lnL w="6350" cap="flat" cmpd="sng" algn="ctr">
+                      <a:solidFill>
+                        <a:srgbClr val="E2E8F0"/>
+                      </a:solidFill>
+                      <a:prstDash val="solid"/>
+                    </a:lnL>
+                    <a:lnR w="6350" cap="flat" cmpd="sng" algn="ctr">
+                      <a:solidFill>
+                        <a:srgbClr val="E2E8F0"/>
+                      </a:solidFill>
+                      <a:prstDash val="solid"/>
+                    </a:lnR>
+                    <a:lnT w="6350" cap="flat" cmpd="sng" algn="ctr">
+                      <a:solidFill>
+                        <a:srgbClr val="E2E8F0"/>
+                      </a:solidFill>
+                      <a:prstDash val="solid"/>
+                    </a:lnT>
+                    <a:lnB w="6350" cap="flat" cmpd="sng" algn="ctr">
+                      <a:solidFill>
+                        <a:srgbClr val="E2E8F0"/>
+                      </a:solidFill>
+                      <a:prstDash val="solid"/>
+                    </a:lnB>
+                    <a:solidFill>
+                      <a:srgbClr val="FFFFFF"/>
+                    </a:solidFill>
+                  </a:tcPr>
+                </a:tc>
+                <a:tc>
+                  <a:txBody>
+                    <a:bodyPr/>
+                    <a:lstStyle/>
+                    <a:p>
+                      <a:pPr algn="ctr"/>
+                      <a:r>
+                        <a:rPr lang="es-PE" sz="1000" b="1" i="0">
+                          <a:solidFill>
+                            <a:srgbClr val="0F172A"/>
+                          </a:solidFill>
+                          <a:latin typeface="DM Sans"/>
+                        </a:rPr>
+                        <a:t>1.25</a:t>
+                      </a:r>
+                    </a:p>
+                  </a:txBody>
+                  <a:tcPr marL="45720" marR="45720" marT="18288" marB="18288" anchor="ctr">
+                    <a:lnL w="6350" cap="flat" cmpd="sng" algn="ctr">
+                      <a:solidFill>
+                        <a:srgbClr val="E2E8F0"/>
+                      </a:solidFill>
+                      <a:prstDash val="solid"/>
+                    </a:lnL>
+                    <a:lnR w="6350" cap="flat" cmpd="sng" algn="ctr">
+                      <a:solidFill>
+                        <a:srgbClr val="E2E8F0"/>
+                      </a:solidFill>
+                      <a:prstDash val="solid"/>
+                    </a:lnR>
+                    <a:lnT w="6350" cap="flat" cmpd="sng" algn="ctr">
+                      <a:solidFill>
+                        <a:srgbClr val="E2E8F0"/>
+                      </a:solidFill>
+                      <a:prstDash val="solid"/>
+                    </a:lnT>
+                    <a:lnB w="6350" cap="flat" cmpd="sng" algn="ctr">
+                      <a:solidFill>
+                        <a:srgbClr val="E2E8F0"/>
+                      </a:solidFill>
+                      <a:prstDash val="solid"/>
+                    </a:lnB>
+                    <a:solidFill>
+                      <a:srgbClr val="FFFFFF"/>
+                    </a:solidFill>
+                  </a:tcPr>
+                </a:tc>
+                <a:tc>
+                  <a:txBody>
+                    <a:bodyPr/>
+                    <a:lstStyle/>
+                    <a:p>
+                      <a:pPr algn="ctr"/>
+                      <a:r>
+                        <a:rPr lang="es-PE" sz="1000" b="1" i="0">
+                          <a:solidFill>
+                            <a:srgbClr val="0F172A"/>
+                          </a:solidFill>
+                          <a:latin typeface="DM Sans"/>
+                        </a:rPr>
+                        <a:t>1.5</a:t>
+                      </a:r>
+                    </a:p>
+                  </a:txBody>
+                  <a:tcPr marL="45720" marR="45720" marT="18288" marB="18288" anchor="ctr">
+                    <a:lnL w="6350" cap="flat" cmpd="sng" algn="ctr">
+                      <a:solidFill>
+                        <a:srgbClr val="E2E8F0"/>
+                      </a:solidFill>
+                      <a:prstDash val="solid"/>
+                    </a:lnL>
+                    <a:lnR w="6350" cap="flat" cmpd="sng" algn="ctr">
+                      <a:solidFill>
+                        <a:srgbClr val="E2E8F0"/>
+                      </a:solidFill>
+                      <a:prstDash val="solid"/>
+                    </a:lnR>
+                    <a:lnT w="6350" cap="flat" cmpd="sng" algn="ctr">
+                      <a:solidFill>
+                        <a:srgbClr val="E2E8F0"/>
+                      </a:solidFill>
+                      <a:prstDash val="solid"/>
+                    </a:lnT>
+                    <a:lnB w="6350" cap="flat" cmpd="sng" algn="ctr">
+                      <a:solidFill>
+                        <a:srgbClr val="E2E8F0"/>
+                      </a:solidFill>
+                      <a:prstDash val="solid"/>
+                    </a:lnB>
+                    <a:solidFill>
+                      <a:srgbClr val="FFFFFF"/>
+                    </a:solidFill>
+                  </a:tcPr>
+                </a:tc>
+              </a:tr>
+              <a:tr h="192024">
+                <a:tc>
+                  <a:txBody>
+                    <a:bodyPr/>
+                    <a:lstStyle/>
+                    <a:p>
+                      <a:pPr algn="l"/>
+                      <a:r>
+                        <a:rPr lang="es-PE" sz="1000" b="1" i="0">
+                          <a:solidFill>
+                            <a:srgbClr val="475569"/>
+                          </a:solidFill>
+                          <a:latin typeface="DM Sans"/>
+                        </a:rPr>
+                        <a:t>Días a evaluación</a:t>
+                      </a:r>
+                    </a:p>
+                  </a:txBody>
+                  <a:tcPr marL="45720" marR="45720" marT="18288" marB="18288" anchor="ctr">
+                    <a:lnL w="6350" cap="flat" cmpd="sng" algn="ctr">
+                      <a:solidFill>
+                        <a:srgbClr val="E2E8F0"/>
+                      </a:solidFill>
+                      <a:prstDash val="solid"/>
+                    </a:lnL>
+                    <a:lnR w="6350" cap="flat" cmpd="sng" algn="ctr">
+                      <a:solidFill>
+                        <a:srgbClr val="E2E8F0"/>
+                      </a:solidFill>
+                      <a:prstDash val="solid"/>
+                    </a:lnR>
+                    <a:lnT w="6350" cap="flat" cmpd="sng" algn="ctr">
+                      <a:solidFill>
+                        <a:srgbClr val="E2E8F0"/>
+                      </a:solidFill>
+                      <a:prstDash val="solid"/>
+                    </a:lnT>
+                    <a:lnB w="6350" cap="flat" cmpd="sng" algn="ctr">
+                      <a:solidFill>
+                        <a:srgbClr val="E2E8F0"/>
+                      </a:solidFill>
+                      <a:prstDash val="solid"/>
+                    </a:lnB>
+                    <a:solidFill>
+                      <a:srgbClr val="F1F5F9"/>
+                    </a:solidFill>
+                  </a:tcPr>
+                </a:tc>
+                <a:tc>
+                  <a:txBody>
+                    <a:bodyPr/>
+                    <a:lstStyle/>
+                    <a:p>
+                      <a:pPr algn="ctr"/>
+                      <a:r>
+                        <a:rPr lang="es-PE" sz="1000" b="0" i="0">
+                          <a:solidFill>
+                            <a:srgbClr val="475569"/>
+                          </a:solidFill>
+                          <a:latin typeface="DM Sans"/>
+                        </a:rPr>
+                        <a:t>≤3</a:t>
+                      </a:r>
+                    </a:p>
+                  </a:txBody>
+                  <a:tcPr marL="45720" marR="45720" marT="18288" marB="18288" anchor="ctr">
+                    <a:lnL w="6350" cap="flat" cmpd="sng" algn="ctr">
+                      <a:solidFill>
+                        <a:srgbClr val="E2E8F0"/>
+                      </a:solidFill>
+                      <a:prstDash val="solid"/>
+                    </a:lnL>
+                    <a:lnR w="6350" cap="flat" cmpd="sng" algn="ctr">
+                      <a:solidFill>
+                        <a:srgbClr val="E2E8F0"/>
+                      </a:solidFill>
+                      <a:prstDash val="solid"/>
+                    </a:lnR>
+                    <a:lnT w="6350" cap="flat" cmpd="sng" algn="ctr">
+                      <a:solidFill>
+                        <a:srgbClr val="E2E8F0"/>
+                      </a:solidFill>
+                      <a:prstDash val="solid"/>
+                    </a:lnT>
+                    <a:lnB w="6350" cap="flat" cmpd="sng" algn="ctr">
+                      <a:solidFill>
+                        <a:srgbClr val="E2E8F0"/>
+                      </a:solidFill>
+                      <a:prstDash val="solid"/>
+                    </a:lnB>
+                    <a:solidFill>
+                      <a:srgbClr val="F1F5F9"/>
+                    </a:solidFill>
+                  </a:tcPr>
+                </a:tc>
+                <a:tc>
+                  <a:txBody>
+                    <a:bodyPr/>
+                    <a:lstStyle/>
+                    <a:p>
+                      <a:pPr algn="ctr"/>
+                      <a:r>
+                        <a:rPr lang="es-PE" sz="1000" b="0" i="0">
+                          <a:solidFill>
+                            <a:srgbClr val="475569"/>
+                          </a:solidFill>
+                          <a:latin typeface="DM Sans"/>
+                        </a:rPr>
+                        <a:t>≤7</a:t>
+                      </a:r>
+                    </a:p>
+                  </a:txBody>
+                  <a:tcPr marL="45720" marR="45720" marT="18288" marB="18288" anchor="ctr">
+                    <a:lnL w="6350" cap="flat" cmpd="sng" algn="ctr">
+                      <a:solidFill>
+                        <a:srgbClr val="E2E8F0"/>
+                      </a:solidFill>
+                      <a:prstDash val="solid"/>
+                    </a:lnL>
+                    <a:lnR w="6350" cap="flat" cmpd="sng" algn="ctr">
+                      <a:solidFill>
+                        <a:srgbClr val="E2E8F0"/>
+                      </a:solidFill>
+                      <a:prstDash val="solid"/>
+                    </a:lnR>
+                    <a:lnT w="6350" cap="flat" cmpd="sng" algn="ctr">
+                      <a:solidFill>
+                        <a:srgbClr val="E2E8F0"/>
+                      </a:solidFill>
+                      <a:prstDash val="solid"/>
+                    </a:lnT>
+                    <a:lnB w="6350" cap="flat" cmpd="sng" algn="ctr">
+                      <a:solidFill>
+                        <a:srgbClr val="E2E8F0"/>
+                      </a:solidFill>
+                      <a:prstDash val="solid"/>
+                    </a:lnB>
+                    <a:solidFill>
+                      <a:srgbClr val="F1F5F9"/>
+                    </a:solidFill>
+                  </a:tcPr>
+                </a:tc>
+                <a:tc>
+                  <a:txBody>
+                    <a:bodyPr/>
+                    <a:lstStyle/>
+                    <a:p>
+                      <a:pPr algn="ctr"/>
+                      <a:r>
+                        <a:rPr lang="es-PE" sz="1000" b="0" i="0">
+                          <a:solidFill>
+                            <a:srgbClr val="475569"/>
+                          </a:solidFill>
+                          <a:latin typeface="DM Sans"/>
+                        </a:rPr>
+                        <a:t>≤14</a:t>
+                      </a:r>
+                    </a:p>
+                  </a:txBody>
+                  <a:tcPr marL="45720" marR="45720" marT="18288" marB="18288" anchor="ctr">
+                    <a:lnL w="6350" cap="flat" cmpd="sng" algn="ctr">
+                      <a:solidFill>
+                        <a:srgbClr val="E2E8F0"/>
+                      </a:solidFill>
+                      <a:prstDash val="solid"/>
+                    </a:lnL>
+                    <a:lnR w="6350" cap="flat" cmpd="sng" algn="ctr">
+                      <a:solidFill>
+                        <a:srgbClr val="E2E8F0"/>
+                      </a:solidFill>
+                      <a:prstDash val="solid"/>
+                    </a:lnR>
+                    <a:lnT w="6350" cap="flat" cmpd="sng" algn="ctr">
+                      <a:solidFill>
+                        <a:srgbClr val="E2E8F0"/>
+                      </a:solidFill>
+                      <a:prstDash val="solid"/>
+                    </a:lnT>
+                    <a:lnB w="6350" cap="flat" cmpd="sng" algn="ctr">
+                      <a:solidFill>
+                        <a:srgbClr val="E2E8F0"/>
+                      </a:solidFill>
+                      <a:prstDash val="solid"/>
+                    </a:lnB>
+                    <a:solidFill>
+                      <a:srgbClr val="F1F5F9"/>
+                    </a:solidFill>
+                  </a:tcPr>
+                </a:tc>
+                <a:tc>
+                  <a:txBody>
+                    <a:bodyPr/>
+                    <a:lstStyle/>
+                    <a:p>
+                      <a:pPr algn="ctr"/>
+                      <a:r>
+                        <a:rPr lang="es-PE" sz="1000" b="0" i="0">
+                          <a:solidFill>
+                            <a:srgbClr val="475569"/>
+                          </a:solidFill>
+                          <a:latin typeface="DM Sans"/>
+                        </a:rPr>
+                        <a:t>&gt;14</a:t>
+                      </a:r>
+                    </a:p>
+                  </a:txBody>
+                  <a:tcPr marL="45720" marR="45720" marT="18288" marB="18288" anchor="ctr">
+                    <a:lnL w="6350" cap="flat" cmpd="sng" algn="ctr">
+                      <a:solidFill>
+                        <a:srgbClr val="E2E8F0"/>
+                      </a:solidFill>
+                      <a:prstDash val="solid"/>
+                    </a:lnL>
+                    <a:lnR w="6350" cap="flat" cmpd="sng" algn="ctr">
+                      <a:solidFill>
+                        <a:srgbClr val="E2E8F0"/>
+                      </a:solidFill>
+                      <a:prstDash val="solid"/>
+                    </a:lnR>
+                    <a:lnT w="6350" cap="flat" cmpd="sng" algn="ctr">
+                      <a:solidFill>
+                        <a:srgbClr val="E2E8F0"/>
+                      </a:solidFill>
+                      <a:prstDash val="solid"/>
+                    </a:lnT>
+                    <a:lnB w="6350" cap="flat" cmpd="sng" algn="ctr">
+                      <a:solidFill>
+                        <a:srgbClr val="E2E8F0"/>
+                      </a:solidFill>
+                      <a:prstDash val="solid"/>
+                    </a:lnB>
+                    <a:solidFill>
+                      <a:srgbClr val="F1F5F9"/>
+                    </a:solidFill>
+                  </a:tcPr>
+                </a:tc>
+                <a:tc>
+                  <a:txBody>
+                    <a:bodyPr/>
+                    <a:lstStyle/>
+                    <a:p>
+                      <a:pPr algn="ctr"/>
+                      <a:r>
+                        <a:rPr lang="es-PE" sz="1000" b="0" i="0">
+                          <a:solidFill>
+                            <a:srgbClr val="475569"/>
+                          </a:solidFill>
+                          <a:latin typeface="DM Sans"/>
+                        </a:rPr>
+                        <a:t>sin dato</a:t>
+                      </a:r>
+                    </a:p>
+                  </a:txBody>
+                  <a:tcPr marL="45720" marR="45720" marT="18288" marB="18288" anchor="ctr">
+                    <a:lnL w="6350" cap="flat" cmpd="sng" algn="ctr">
+                      <a:solidFill>
+                        <a:srgbClr val="E2E8F0"/>
+                      </a:solidFill>
+                      <a:prstDash val="solid"/>
+                    </a:lnL>
+                    <a:lnR w="6350" cap="flat" cmpd="sng" algn="ctr">
+                      <a:solidFill>
+                        <a:srgbClr val="E2E8F0"/>
+                      </a:solidFill>
+                      <a:prstDash val="solid"/>
+                    </a:lnR>
+                    <a:lnT w="6350" cap="flat" cmpd="sng" algn="ctr">
+                      <a:solidFill>
+                        <a:srgbClr val="E2E8F0"/>
+                      </a:solidFill>
+                      <a:prstDash val="solid"/>
+                    </a:lnT>
+                    <a:lnB w="6350" cap="flat" cmpd="sng" algn="ctr">
+                      <a:solidFill>
+                        <a:srgbClr val="E2E8F0"/>
+                      </a:solidFill>
+                      <a:prstDash val="solid"/>
+                    </a:lnB>
+                    <a:solidFill>
+                      <a:srgbClr val="F1F5F9"/>
+                    </a:solidFill>
+                  </a:tcPr>
+                </a:tc>
+              </a:tr>
+              <a:tr h="192024">
+                <a:tc>
+                  <a:txBody>
+                    <a:bodyPr/>
+                    <a:lstStyle/>
+                    <a:p>
+                      <a:pPr algn="l"/>
+                      <a:r>
+                        <a:rPr lang="es-PE" sz="1000" b="1" i="0">
+                          <a:solidFill>
+                            <a:srgbClr val="0F172A"/>
+                          </a:solidFill>
+                          <a:latin typeface="DM Sans"/>
+                        </a:rPr>
+                        <a:t>→ F_urg</a:t>
+                      </a:r>
+                    </a:p>
+                  </a:txBody>
+                  <a:tcPr marL="45720" marR="45720" marT="18288" marB="18288" anchor="ctr">
+                    <a:lnL w="6350" cap="flat" cmpd="sng" algn="ctr">
+                      <a:solidFill>
+                        <a:srgbClr val="E2E8F0"/>
+                      </a:solidFill>
+                      <a:prstDash val="solid"/>
+                    </a:lnL>
+                    <a:lnR w="6350" cap="flat" cmpd="sng" algn="ctr">
+                      <a:solidFill>
+                        <a:srgbClr val="E2E8F0"/>
+                      </a:solidFill>
+                      <a:prstDash val="solid"/>
+                    </a:lnR>
+                    <a:lnT w="6350" cap="flat" cmpd="sng" algn="ctr">
+                      <a:solidFill>
+                        <a:srgbClr val="E2E8F0"/>
+                      </a:solidFill>
+                      <a:prstDash val="solid"/>
+                    </a:lnT>
+                    <a:lnB w="6350" cap="flat" cmpd="sng" algn="ctr">
+                      <a:solidFill>
+                        <a:srgbClr val="E2E8F0"/>
+                      </a:solidFill>
+                      <a:prstDash val="solid"/>
+                    </a:lnB>
+                    <a:solidFill>
+                      <a:srgbClr val="FFFFFF"/>
+                    </a:solidFill>
+                  </a:tcPr>
+                </a:tc>
+                <a:tc>
+                  <a:txBody>
+                    <a:bodyPr/>
+                    <a:lstStyle/>
+                    <a:p>
+                      <a:pPr algn="ctr"/>
+                      <a:r>
+                        <a:rPr lang="es-PE" sz="1000" b="1" i="0">
+                          <a:solidFill>
+                            <a:srgbClr val="0F172A"/>
+                          </a:solidFill>
+                          <a:latin typeface="DM Sans"/>
+                        </a:rPr>
+                        <a:t>1.5</a:t>
+                      </a:r>
+                    </a:p>
+                  </a:txBody>
+                  <a:tcPr marL="45720" marR="45720" marT="18288" marB="18288" anchor="ctr">
+                    <a:lnL w="6350" cap="flat" cmpd="sng" algn="ctr">
+                      <a:solidFill>
+                        <a:srgbClr val="E2E8F0"/>
+                      </a:solidFill>
+                      <a:prstDash val="solid"/>
+                    </a:lnL>
+                    <a:lnR w="6350" cap="flat" cmpd="sng" algn="ctr">
+                      <a:solidFill>
+                        <a:srgbClr val="E2E8F0"/>
+                      </a:solidFill>
+                      <a:prstDash val="solid"/>
+                    </a:lnR>
+                    <a:lnT w="6350" cap="flat" cmpd="sng" algn="ctr">
+                      <a:solidFill>
+                        <a:srgbClr val="E2E8F0"/>
+                      </a:solidFill>
+                      <a:prstDash val="solid"/>
+                    </a:lnT>
+                    <a:lnB w="6350" cap="flat" cmpd="sng" algn="ctr">
+                      <a:solidFill>
+                        <a:srgbClr val="E2E8F0"/>
+                      </a:solidFill>
+                      <a:prstDash val="solid"/>
+                    </a:lnB>
+                    <a:solidFill>
+                      <a:srgbClr val="FFFFFF"/>
+                    </a:solidFill>
+                  </a:tcPr>
+                </a:tc>
+                <a:tc>
+                  <a:txBody>
+                    <a:bodyPr/>
+                    <a:lstStyle/>
+                    <a:p>
+                      <a:pPr algn="ctr"/>
+                      <a:r>
+                        <a:rPr lang="es-PE" sz="1000" b="1" i="0">
+                          <a:solidFill>
+                            <a:srgbClr val="0F172A"/>
+                          </a:solidFill>
+                          <a:latin typeface="DM Sans"/>
+                        </a:rPr>
+                        <a:t>1.3</a:t>
+                      </a:r>
+                    </a:p>
+                  </a:txBody>
+                  <a:tcPr marL="45720" marR="45720" marT="18288" marB="18288" anchor="ctr">
+                    <a:lnL w="6350" cap="flat" cmpd="sng" algn="ctr">
+                      <a:solidFill>
+                        <a:srgbClr val="E2E8F0"/>
+                      </a:solidFill>
+                      <a:prstDash val="solid"/>
+                    </a:lnL>
+                    <a:lnR w="6350" cap="flat" cmpd="sng" algn="ctr">
+                      <a:solidFill>
+                        <a:srgbClr val="E2E8F0"/>
+                      </a:solidFill>
+                      <a:prstDash val="solid"/>
+                    </a:lnR>
+                    <a:lnT w="6350" cap="flat" cmpd="sng" algn="ctr">
+                      <a:solidFill>
+                        <a:srgbClr val="E2E8F0"/>
+                      </a:solidFill>
+                      <a:prstDash val="solid"/>
+                    </a:lnT>
+                    <a:lnB w="6350" cap="flat" cmpd="sng" algn="ctr">
+                      <a:solidFill>
+                        <a:srgbClr val="E2E8F0"/>
+                      </a:solidFill>
+                      <a:prstDash val="solid"/>
+                    </a:lnB>
+                    <a:solidFill>
+                      <a:srgbClr val="FFFFFF"/>
+                    </a:solidFill>
+                  </a:tcPr>
+                </a:tc>
+                <a:tc>
+                  <a:txBody>
+                    <a:bodyPr/>
+                    <a:lstStyle/>
+                    <a:p>
+                      <a:pPr algn="ctr"/>
+                      <a:r>
+                        <a:rPr lang="es-PE" sz="1000" b="1" i="0">
+                          <a:solidFill>
+                            <a:srgbClr val="0F172A"/>
+                          </a:solidFill>
+                          <a:latin typeface="DM Sans"/>
+                        </a:rPr>
+                        <a:t>1.15</a:t>
+                      </a:r>
+                    </a:p>
+                  </a:txBody>
+                  <a:tcPr marL="45720" marR="45720" marT="18288" marB="18288" anchor="ctr">
+                    <a:lnL w="6350" cap="flat" cmpd="sng" algn="ctr">
+                      <a:solidFill>
+                        <a:srgbClr val="E2E8F0"/>
+                      </a:solidFill>
+                      <a:prstDash val="solid"/>
+                    </a:lnL>
+                    <a:lnR w="6350" cap="flat" cmpd="sng" algn="ctr">
+                      <a:solidFill>
+                        <a:srgbClr val="E2E8F0"/>
+                      </a:solidFill>
+                      <a:prstDash val="solid"/>
+                    </a:lnR>
+                    <a:lnT w="6350" cap="flat" cmpd="sng" algn="ctr">
+                      <a:solidFill>
+                        <a:srgbClr val="E2E8F0"/>
+                      </a:solidFill>
+                      <a:prstDash val="solid"/>
+                    </a:lnT>
+                    <a:lnB w="6350" cap="flat" cmpd="sng" algn="ctr">
+                      <a:solidFill>
+                        <a:srgbClr val="E2E8F0"/>
+                      </a:solidFill>
+                      <a:prstDash val="solid"/>
+                    </a:lnB>
+                    <a:solidFill>
+                      <a:srgbClr val="FFFFFF"/>
+                    </a:solidFill>
+                  </a:tcPr>
+                </a:tc>
+                <a:tc>
+                  <a:txBody>
+                    <a:bodyPr/>
+                    <a:lstStyle/>
+                    <a:p>
+                      <a:pPr algn="ctr"/>
+                      <a:r>
+                        <a:rPr lang="es-PE" sz="1000" b="1" i="0">
+                          <a:solidFill>
+                            <a:srgbClr val="0F172A"/>
+                          </a:solidFill>
+                          <a:latin typeface="DM Sans"/>
+                        </a:rPr>
+                        <a:t>1.0</a:t>
+                      </a:r>
+                    </a:p>
+                  </a:txBody>
+                  <a:tcPr marL="45720" marR="45720" marT="18288" marB="18288" anchor="ctr">
+                    <a:lnL w="6350" cap="flat" cmpd="sng" algn="ctr">
+                      <a:solidFill>
+                        <a:srgbClr val="E2E8F0"/>
+                      </a:solidFill>
+                      <a:prstDash val="solid"/>
+                    </a:lnL>
+                    <a:lnR w="6350" cap="flat" cmpd="sng" algn="ctr">
+                      <a:solidFill>
+                        <a:srgbClr val="E2E8F0"/>
+                      </a:solidFill>
+                      <a:prstDash val="solid"/>
+                    </a:lnR>
+                    <a:lnT w="6350" cap="flat" cmpd="sng" algn="ctr">
+                      <a:solidFill>
+                        <a:srgbClr val="E2E8F0"/>
+                      </a:solidFill>
+                      <a:prstDash val="solid"/>
+                    </a:lnT>
+                    <a:lnB w="6350" cap="flat" cmpd="sng" algn="ctr">
+                      <a:solidFill>
+                        <a:srgbClr val="E2E8F0"/>
+                      </a:solidFill>
+                      <a:prstDash val="solid"/>
+                    </a:lnB>
+                    <a:solidFill>
+                      <a:srgbClr val="FFFFFF"/>
+                    </a:solidFill>
+                  </a:tcPr>
+                </a:tc>
+                <a:tc>
+                  <a:txBody>
+                    <a:bodyPr/>
+                    <a:lstStyle/>
+                    <a:p>
+                      <a:pPr algn="ctr"/>
+                      <a:r>
+                        <a:rPr lang="es-PE" sz="1000" b="1" i="0">
+                          <a:solidFill>
+                            <a:srgbClr val="0F172A"/>
+                          </a:solidFill>
+                          <a:latin typeface="DM Sans"/>
+                        </a:rPr>
+                        <a:t>1.0</a:t>
+                      </a:r>
+                    </a:p>
+                  </a:txBody>
+                  <a:tcPr marL="45720" marR="45720" marT="18288" marB="18288" anchor="ctr">
+                    <a:lnL w="6350" cap="flat" cmpd="sng" algn="ctr">
+                      <a:solidFill>
+                        <a:srgbClr val="E2E8F0"/>
+                      </a:solidFill>
+                      <a:prstDash val="solid"/>
+                    </a:lnL>
+                    <a:lnR w="6350" cap="flat" cmpd="sng" algn="ctr">
+                      <a:solidFill>
+                        <a:srgbClr val="E2E8F0"/>
+                      </a:solidFill>
+                      <a:prstDash val="solid"/>
+                    </a:lnR>
+                    <a:lnT w="6350" cap="flat" cmpd="sng" algn="ctr">
+                      <a:solidFill>
+                        <a:srgbClr val="E2E8F0"/>
+                      </a:solidFill>
+                      <a:prstDash val="solid"/>
+                    </a:lnT>
+                    <a:lnB w="6350" cap="flat" cmpd="sng" algn="ctr">
+                      <a:solidFill>
+                        <a:srgbClr val="E2E8F0"/>
+                      </a:solidFill>
+                      <a:prstDash val="solid"/>
+                    </a:lnB>
+                    <a:solidFill>
+                      <a:srgbClr val="FFFFFF"/>
+                    </a:solidFill>
+                  </a:tcPr>
+                </a:tc>
+              </a:tr>
+            </a:tbl>
+          </a:graphicData>
+        </a:graphic>
+      </p:graphicFrame>
     </p:spTree>
   </p:cSld>
   <p:clrMapOvr>

--- a/Planificador_de_Estudio_Multi-Agente.pptx
+++ b/Planificador_de_Estudio_Multi-Agente.pptx
@@ -3616,7 +3616,7 @@
         </p:nvSpPr>
         <p:spPr>
           <a:xfrm>
-            <a:off x="7467600" y="6134100"/>
+            <a:off x="609905" y="5897880"/>
             <a:ext cx="4724400" cy="190500"/>
           </a:xfrm>
           <a:prstGeom prst="rect">
@@ -3640,91 +3640,6 @@
               </a:rPr>
               <a:t>Python · LangGraph · LangChain · Pydantic · Groq</a:t>
             </a:r>
-          </a:p>
-        </p:txBody>
-      </p:sp>
-      <p:sp>
-        <p:nvSpPr>
-          <p:cNvPr id="10" name="TextBox 9"/>
-          <p:cNvSpPr txBox="1"/>
-          <p:nvPr/>
-        </p:nvSpPr>
-        <p:spPr>
-          <a:xfrm>
-            <a:off x="609600" y="5886450"/>
-            <a:ext cx="820738" cy="161583"/>
-          </a:xfrm>
-          <a:prstGeom prst="rect">
-            <a:avLst/>
-          </a:prstGeom>
-          <a:noFill/>
-        </p:spPr>
-        <p:txBody>
-          <a:bodyPr wrap="none" lIns="0" tIns="0" rIns="0" bIns="0" anchor="t">
-            <a:spAutoFit/>
-          </a:bodyPr>
-          <a:lstStyle/>
-          <a:p>
-            <a:pPr algn="l"/>
-            <a:r>
-              <a:rPr sz="1050" b="0" i="0" u="none" dirty="0">
-                <a:solidFill>
-                  <a:srgbClr val="64748B"/>
-                </a:solidFill>
-                <a:latin typeface="DM Sans"/>
-              </a:rPr>
-              <a:t>EXPOSITOR </a:t>
-            </a:r>
-          </a:p>
-        </p:txBody>
-      </p:sp>
-      <p:sp>
-        <p:nvSpPr>
-          <p:cNvPr id="11" name="TextBox 10"/>
-          <p:cNvSpPr txBox="1"/>
-          <p:nvPr/>
-        </p:nvSpPr>
-        <p:spPr>
-          <a:xfrm>
-            <a:off x="609600" y="6096000"/>
-            <a:ext cx="1000274" cy="207749"/>
-          </a:xfrm>
-          <a:prstGeom prst="rect">
-            <a:avLst/>
-          </a:prstGeom>
-          <a:noFill/>
-        </p:spPr>
-        <p:txBody>
-          <a:bodyPr wrap="none" lIns="0" tIns="0" rIns="0" bIns="0" anchor="t">
-            <a:spAutoFit/>
-          </a:bodyPr>
-          <a:lstStyle/>
-          <a:p>
-            <a:pPr algn="l"/>
-            <a:r>
-              <a:rPr sz="1350" b="1" i="0" u="none" dirty="0">
-                <a:solidFill>
-                  <a:srgbClr val="F8FAFC"/>
-                </a:solidFill>
-                <a:latin typeface="DM Sans"/>
-              </a:rPr>
-              <a:t>Juan </a:t>
-            </a:r>
-            <a:r>
-              <a:rPr sz="1350" b="1" i="0" u="none" dirty="0" smtClean="0">
-                <a:solidFill>
-                  <a:srgbClr val="F8FAFC"/>
-                </a:solidFill>
-                <a:latin typeface="DM Sans"/>
-              </a:rPr>
-              <a:t>Castro</a:t>
-            </a:r>
-            <a:endParaRPr sz="1350" b="1" i="0" u="none" dirty="0">
-              <a:solidFill>
-                <a:srgbClr val="F8FAFC"/>
-              </a:solidFill>
-              <a:latin typeface="DM Sans"/>
-            </a:endParaRPr>
           </a:p>
         </p:txBody>
       </p:sp>
@@ -5083,7 +4998,7 @@
                 </a:solidFill>
                 <a:latin typeface="DM Sans"/>
               </a:rPr>
-              <a:t> Estudiantes por egresar y asesores académicos revisores.</a:t>
+              <a:t xml:space="preserve"> Solo estudiantes y personas por egresar que tienen otras ocupaciones.</a:t>
             </a:r>
           </a:p>
         </p:txBody>
